--- a/public/lessons/year-6-maths/autumn/week-2/choose-the-required-accuracy/teaching-powerpoint-v1.pptx
+++ b/public/lessons/year-6-maths/autumn/week-2/choose-the-required-accuracy/teaching-powerpoint-v1.pptx
@@ -2,24 +2,24 @@
 <file path=ppt/presentation.xml><?xml version="1.0" encoding="utf-8"?>
 <p:presentation xmlns:p="http://schemas.openxmlformats.org/presentationml/2006/main">
   <p:sldMasterIdLst>
-    <p:sldMasterId xmlns:r="http://schemas.openxmlformats.org/officeDocument/2006/relationships" id="2147483648" r:id="Rb8be2ca6e9e743ac"/>
+    <p:sldMasterId xmlns:r="http://schemas.openxmlformats.org/officeDocument/2006/relationships" id="2147483648" r:id="R869109ad745649bf"/>
   </p:sldMasterIdLst>
   <p:notesMasterIdLst>
-    <p:notesMasterId xmlns:r="http://schemas.openxmlformats.org/officeDocument/2006/relationships" r:id="Rb9730f82ca0843fb"/>
+    <p:notesMasterId xmlns:r="http://schemas.openxmlformats.org/officeDocument/2006/relationships" r:id="R82d3fb90a1794951"/>
   </p:notesMasterIdLst>
   <p:sldIdLst>
-    <p:sldId xmlns:r="http://schemas.openxmlformats.org/officeDocument/2006/relationships" id="256" r:id="R579c55151ea94735"/>
-    <p:sldId xmlns:r="http://schemas.openxmlformats.org/officeDocument/2006/relationships" id="257" r:id="Rced44b26ecbd4e6e"/>
-    <p:sldId xmlns:r="http://schemas.openxmlformats.org/officeDocument/2006/relationships" id="258" r:id="R503b65c817af4716"/>
-    <p:sldId xmlns:r="http://schemas.openxmlformats.org/officeDocument/2006/relationships" id="259" r:id="Ra0e87ee0844048db"/>
-    <p:sldId xmlns:r="http://schemas.openxmlformats.org/officeDocument/2006/relationships" id="260" r:id="R085f67ea6ab54935"/>
-    <p:sldId xmlns:r="http://schemas.openxmlformats.org/officeDocument/2006/relationships" id="261" r:id="R3e91c1d3e766496b"/>
-    <p:sldId xmlns:r="http://schemas.openxmlformats.org/officeDocument/2006/relationships" id="262" r:id="R0e5b9136c0234e65"/>
-    <p:sldId xmlns:r="http://schemas.openxmlformats.org/officeDocument/2006/relationships" id="263" r:id="Reb10b5259fc04881"/>
-    <p:sldId xmlns:r="http://schemas.openxmlformats.org/officeDocument/2006/relationships" id="264" r:id="Rf5178546fdbe4f0e"/>
-    <p:sldId xmlns:r="http://schemas.openxmlformats.org/officeDocument/2006/relationships" id="265" r:id="R302831d891bf4318"/>
-    <p:sldId xmlns:r="http://schemas.openxmlformats.org/officeDocument/2006/relationships" id="266" r:id="Re4c60255e8614ef6"/>
-    <p:sldId xmlns:r="http://schemas.openxmlformats.org/officeDocument/2006/relationships" id="267" r:id="Rebb53b29310e455b"/>
+    <p:sldId xmlns:r="http://schemas.openxmlformats.org/officeDocument/2006/relationships" id="256" r:id="R6b623e1a9d364c15"/>
+    <p:sldId xmlns:r="http://schemas.openxmlformats.org/officeDocument/2006/relationships" id="257" r:id="R395c9b4f89084025"/>
+    <p:sldId xmlns:r="http://schemas.openxmlformats.org/officeDocument/2006/relationships" id="258" r:id="R5feb681938ce40f6"/>
+    <p:sldId xmlns:r="http://schemas.openxmlformats.org/officeDocument/2006/relationships" id="259" r:id="R51ce79ef3e9c4128"/>
+    <p:sldId xmlns:r="http://schemas.openxmlformats.org/officeDocument/2006/relationships" id="260" r:id="R7fd8a552f87542d7"/>
+    <p:sldId xmlns:r="http://schemas.openxmlformats.org/officeDocument/2006/relationships" id="261" r:id="Ra1c96a3d738d4993"/>
+    <p:sldId xmlns:r="http://schemas.openxmlformats.org/officeDocument/2006/relationships" id="262" r:id="R12c79e21670b4e3f"/>
+    <p:sldId xmlns:r="http://schemas.openxmlformats.org/officeDocument/2006/relationships" id="263" r:id="R01185b44c9b94e2f"/>
+    <p:sldId xmlns:r="http://schemas.openxmlformats.org/officeDocument/2006/relationships" id="264" r:id="R8c273876e4a5475c"/>
+    <p:sldId xmlns:r="http://schemas.openxmlformats.org/officeDocument/2006/relationships" id="265" r:id="Rc52173c20cd84173"/>
+    <p:sldId xmlns:r="http://schemas.openxmlformats.org/officeDocument/2006/relationships" id="266" r:id="R2e24094c3a4346a2"/>
+    <p:sldId xmlns:r="http://schemas.openxmlformats.org/officeDocument/2006/relationships" id="267" r:id="R1e1c37b2ec414fd7"/>
   </p:sldIdLst>
   <p:sldSz cx="12192000" cy="6858000"/>
   <p:notesSz cx="6858000" cy="9144000"/>
@@ -873,7 +873,7 @@
           <a:lstStyle xmlns:a="http://schemas.openxmlformats.org/drawingml/2006/main"/>
           <a:p xmlns:a="http://schemas.openxmlformats.org/drawingml/2006/main">
             <a:r>
-              <a:t>I do. Reveal the question, setup and each calculation stage one click at a time. Pupils watch before copying. Model answer: 380,000 and 385,000.</a:t>
+              <a:t>I do. Reveal the question, then reveal each mathematical change one click at a time. Point to the numbers and operation that changed before moving to the next line. Final answer: 380,000 and 385,000.</a:t>
             </a:r>
           </a:p>
         </p:txBody>
@@ -1291,7 +1291,7 @@
   </p:cSld>
   <p:clrMap bg1="lt1" tx1="dk1" bg2="lt2" tx2="dk2" accent1="accent1" accent2="accent2" accent3="accent3" accent4="accent4" accent5="accent5" accent6="accent6" hlink="hlink" folHlink="folHlink"/>
   <p:sldLayoutIdLst>
-    <p:sldLayoutId xmlns:r="http://schemas.openxmlformats.org/officeDocument/2006/relationships" id="2147483649" r:id="Rbea2074f8dba45a7"/>
+    <p:sldLayoutId xmlns:r="http://schemas.openxmlformats.org/officeDocument/2006/relationships" id="2147483649" r:id="R0963745bb3bf4dfc"/>
   </p:sldLayoutIdLst>
   <p:txStyles>
     <p:titleStyle>
@@ -1842,7 +1842,7 @@
           <p:cNvPr id="12" name="">
             <a:extLst xmlns:a="http://schemas.openxmlformats.org/drawingml/2006/main">
               <a:ext uri="{FF2B5EF4-FFF2-40B4-BE49-F238E27FC236}">
-                <a16:creationId xmlns:a16="http://schemas.microsoft.com/office/drawing/2014/main" id="{60608B7E-F4EB-4087-8B0F-125E51FED7A9}"/>
+                <a16:creationId xmlns:a16="http://schemas.microsoft.com/office/drawing/2014/main" id="{7911B06F-071E-4642-829F-E8E4B335636D}"/>
               </a:ext>
             </a:extLst>
           </p:cNvPr>
@@ -1874,7 +1874,7 @@
           <p:cNvPr id="2" name="">
             <a:extLst xmlns:a="http://schemas.openxmlformats.org/drawingml/2006/main">
               <a:ext uri="{FF2B5EF4-FFF2-40B4-BE49-F238E27FC236}">
-                <a16:creationId xmlns:a16="http://schemas.microsoft.com/office/drawing/2014/main" id="{75605D5C-E2E5-4DFB-BB2E-C31880C83D21}"/>
+                <a16:creationId xmlns:a16="http://schemas.microsoft.com/office/drawing/2014/main" id="{5FF3FF38-AAA8-475B-A8BE-666D55D90FBF}"/>
               </a:ext>
             </a:extLst>
           </p:cNvPr>
@@ -1931,7 +1931,7 @@
           <p:cNvPr id="3" name="">
             <a:extLst xmlns:a="http://schemas.openxmlformats.org/drawingml/2006/main">
               <a:ext uri="{FF2B5EF4-FFF2-40B4-BE49-F238E27FC236}">
-                <a16:creationId xmlns:a16="http://schemas.microsoft.com/office/drawing/2014/main" id="{5D6EF3BD-EE13-4F0C-8A52-6B1247DB2B62}"/>
+                <a16:creationId xmlns:a16="http://schemas.microsoft.com/office/drawing/2014/main" id="{1A905BF1-B80E-472D-B989-85FE47135197}"/>
               </a:ext>
             </a:extLst>
           </p:cNvPr>
@@ -1965,7 +1965,7 @@
           <p:cNvPr id="4" name="">
             <a:extLst xmlns:a="http://schemas.openxmlformats.org/drawingml/2006/main">
               <a:ext uri="{FF2B5EF4-FFF2-40B4-BE49-F238E27FC236}">
-                <a16:creationId xmlns:a16="http://schemas.microsoft.com/office/drawing/2014/main" id="{1BBC26CE-FE7E-47AF-9135-88FC2F5976CE}"/>
+                <a16:creationId xmlns:a16="http://schemas.microsoft.com/office/drawing/2014/main" id="{E364F878-94D6-4C09-B5CC-1B4794944564}"/>
               </a:ext>
             </a:extLst>
           </p:cNvPr>
@@ -2022,7 +2022,7 @@
           <p:cNvPr id="5" name="">
             <a:extLst xmlns:a="http://schemas.openxmlformats.org/drawingml/2006/main">
               <a:ext uri="{FF2B5EF4-FFF2-40B4-BE49-F238E27FC236}">
-                <a16:creationId xmlns:a16="http://schemas.microsoft.com/office/drawing/2014/main" id="{3E366381-0786-40E1-B020-F36B7B1A4E58}"/>
+                <a16:creationId xmlns:a16="http://schemas.microsoft.com/office/drawing/2014/main" id="{613ADA0B-4766-45EF-AA20-66F39E01603C}"/>
               </a:ext>
             </a:extLst>
           </p:cNvPr>
@@ -2079,7 +2079,7 @@
           <p:cNvPr id="6" name="">
             <a:extLst xmlns:a="http://schemas.openxmlformats.org/drawingml/2006/main">
               <a:ext uri="{FF2B5EF4-FFF2-40B4-BE49-F238E27FC236}">
-                <a16:creationId xmlns:a16="http://schemas.microsoft.com/office/drawing/2014/main" id="{8A9B3D0D-39B1-4DC9-98E6-AB2543B4F27E}"/>
+                <a16:creationId xmlns:a16="http://schemas.microsoft.com/office/drawing/2014/main" id="{086382CB-6300-44B2-AE34-4E5552E436BA}"/>
               </a:ext>
             </a:extLst>
           </p:cNvPr>
@@ -2113,7 +2113,7 @@
           <p:cNvPr id="7" name="">
             <a:extLst xmlns:a="http://schemas.openxmlformats.org/drawingml/2006/main">
               <a:ext uri="{FF2B5EF4-FFF2-40B4-BE49-F238E27FC236}">
-                <a16:creationId xmlns:a16="http://schemas.microsoft.com/office/drawing/2014/main" id="{4AE5E8AF-EC18-4801-8300-1D1856FBFA84}"/>
+                <a16:creationId xmlns:a16="http://schemas.microsoft.com/office/drawing/2014/main" id="{8792A836-2C6C-47FD-956B-36491EA506E6}"/>
               </a:ext>
             </a:extLst>
           </p:cNvPr>
@@ -2170,7 +2170,7 @@
           <p:cNvPr id="8" name="">
             <a:extLst xmlns:a="http://schemas.openxmlformats.org/drawingml/2006/main">
               <a:ext uri="{FF2B5EF4-FFF2-40B4-BE49-F238E27FC236}">
-                <a16:creationId xmlns:a16="http://schemas.microsoft.com/office/drawing/2014/main" id="{51E8A80D-5F3B-479B-AAAB-C7B69BCEFF2B}"/>
+                <a16:creationId xmlns:a16="http://schemas.microsoft.com/office/drawing/2014/main" id="{EEC080C6-057C-4801-BF2D-1AEDA625892F}"/>
               </a:ext>
             </a:extLst>
           </p:cNvPr>
@@ -2227,7 +2227,7 @@
           <p:cNvPr id="9" name="">
             <a:extLst xmlns:a="http://schemas.openxmlformats.org/drawingml/2006/main">
               <a:ext uri="{FF2B5EF4-FFF2-40B4-BE49-F238E27FC236}">
-                <a16:creationId xmlns:a16="http://schemas.microsoft.com/office/drawing/2014/main" id="{B4957FD0-F5E8-4C26-95CC-9A5A484417A8}"/>
+                <a16:creationId xmlns:a16="http://schemas.microsoft.com/office/drawing/2014/main" id="{AE953B9B-9954-4F6D-B697-8A9EDEC732DA}"/>
               </a:ext>
             </a:extLst>
           </p:cNvPr>
@@ -2284,7 +2284,7 @@
           <p:cNvPr id="10" name="">
             <a:extLst xmlns:a="http://schemas.openxmlformats.org/drawingml/2006/main">
               <a:ext uri="{FF2B5EF4-FFF2-40B4-BE49-F238E27FC236}">
-                <a16:creationId xmlns:a16="http://schemas.microsoft.com/office/drawing/2014/main" id="{9AC4744A-E5F4-479F-A6C8-D150AF415DF6}"/>
+                <a16:creationId xmlns:a16="http://schemas.microsoft.com/office/drawing/2014/main" id="{8CDBD435-8273-41E9-AF72-FE353268283A}"/>
               </a:ext>
             </a:extLst>
           </p:cNvPr>
@@ -2341,7 +2341,7 @@
           <p:cNvPr id="11" name="">
             <a:extLst xmlns:a="http://schemas.openxmlformats.org/drawingml/2006/main">
               <a:ext uri="{FF2B5EF4-FFF2-40B4-BE49-F238E27FC236}">
-                <a16:creationId xmlns:a16="http://schemas.microsoft.com/office/drawing/2014/main" id="{C6551DD3-C28D-4C7A-AA6C-4921CE30FA9E}"/>
+                <a16:creationId xmlns:a16="http://schemas.microsoft.com/office/drawing/2014/main" id="{D61F657E-0704-446A-B11F-C62B1456864B}"/>
               </a:ext>
             </a:extLst>
           </p:cNvPr>
@@ -2396,7 +2396,7 @@
     </p:spTree>
     <p:extLst>
       <p:ext uri="{BB962C8B-B14F-4D97-AF65-F5344CB8AC3E}">
-        <p14:creationId xmlns:p14="http://schemas.microsoft.com/office/powerpoint/2010/main" val="1119304351"/>
+        <p14:creationId xmlns:p14="http://schemas.microsoft.com/office/powerpoint/2010/main" val="1065450056"/>
       </p:ext>
     </p:extLst>
   </p:cSld>
@@ -2427,7 +2427,7 @@
           <p:cNvPr id="14" name="">
             <a:extLst xmlns:a="http://schemas.openxmlformats.org/drawingml/2006/main">
               <a:ext uri="{FF2B5EF4-FFF2-40B4-BE49-F238E27FC236}">
-                <a16:creationId xmlns:a16="http://schemas.microsoft.com/office/drawing/2014/main" id="{C191BF64-213E-4AD1-B676-DA05EE9A0D26}"/>
+                <a16:creationId xmlns:a16="http://schemas.microsoft.com/office/drawing/2014/main" id="{D4D25A36-8A7A-45F8-8425-5F3AD9D60213}"/>
               </a:ext>
             </a:extLst>
           </p:cNvPr>
@@ -2459,7 +2459,7 @@
           <p:cNvPr id="2" name="">
             <a:extLst xmlns:a="http://schemas.openxmlformats.org/drawingml/2006/main">
               <a:ext uri="{FF2B5EF4-FFF2-40B4-BE49-F238E27FC236}">
-                <a16:creationId xmlns:a16="http://schemas.microsoft.com/office/drawing/2014/main" id="{24F770AB-B78D-44DA-B84B-7A1B29518187}"/>
+                <a16:creationId xmlns:a16="http://schemas.microsoft.com/office/drawing/2014/main" id="{36C46C21-3D33-4BB9-8C57-8CF4EDA56456}"/>
               </a:ext>
             </a:extLst>
           </p:cNvPr>
@@ -2516,7 +2516,7 @@
           <p:cNvPr id="3" name="">
             <a:extLst xmlns:a="http://schemas.openxmlformats.org/drawingml/2006/main">
               <a:ext uri="{FF2B5EF4-FFF2-40B4-BE49-F238E27FC236}">
-                <a16:creationId xmlns:a16="http://schemas.microsoft.com/office/drawing/2014/main" id="{11AA8F3C-4201-4890-B064-B31B3BDE9752}"/>
+                <a16:creationId xmlns:a16="http://schemas.microsoft.com/office/drawing/2014/main" id="{88426E25-9A5C-4A5E-AC16-661CB0270CC0}"/>
               </a:ext>
             </a:extLst>
           </p:cNvPr>
@@ -2548,7 +2548,7 @@
           <p:cNvPr id="4" name="">
             <a:extLst xmlns:a="http://schemas.openxmlformats.org/drawingml/2006/main">
               <a:ext uri="{FF2B5EF4-FFF2-40B4-BE49-F238E27FC236}">
-                <a16:creationId xmlns:a16="http://schemas.microsoft.com/office/drawing/2014/main" id="{63B1C166-1CBA-42BE-A614-E9CB7E6B74FD}"/>
+                <a16:creationId xmlns:a16="http://schemas.microsoft.com/office/drawing/2014/main" id="{7219E802-EA1E-451E-83FE-477F29170DCF}"/>
               </a:ext>
             </a:extLst>
           </p:cNvPr>
@@ -2605,7 +2605,7 @@
           <p:cNvPr id="5" name="">
             <a:extLst xmlns:a="http://schemas.openxmlformats.org/drawingml/2006/main">
               <a:ext uri="{FF2B5EF4-FFF2-40B4-BE49-F238E27FC236}">
-                <a16:creationId xmlns:a16="http://schemas.microsoft.com/office/drawing/2014/main" id="{32FFF68B-98C6-4D44-A224-66733FA86C90}"/>
+                <a16:creationId xmlns:a16="http://schemas.microsoft.com/office/drawing/2014/main" id="{AB03AE69-5B80-4F9D-B852-E229F1B283DD}"/>
               </a:ext>
             </a:extLst>
           </p:cNvPr>
@@ -2662,7 +2662,7 @@
           <p:cNvPr id="6" name="">
             <a:extLst xmlns:a="http://schemas.openxmlformats.org/drawingml/2006/main">
               <a:ext uri="{FF2B5EF4-FFF2-40B4-BE49-F238E27FC236}">
-                <a16:creationId xmlns:a16="http://schemas.microsoft.com/office/drawing/2014/main" id="{67D771EE-B997-459A-B582-4F87002750E5}"/>
+                <a16:creationId xmlns:a16="http://schemas.microsoft.com/office/drawing/2014/main" id="{67C74520-DB89-4D21-8A4D-B5EAE11E2DBB}"/>
               </a:ext>
             </a:extLst>
           </p:cNvPr>
@@ -2719,7 +2719,7 @@
           <p:cNvPr id="7" name="">
             <a:extLst xmlns:a="http://schemas.openxmlformats.org/drawingml/2006/main">
               <a:ext uri="{FF2B5EF4-FFF2-40B4-BE49-F238E27FC236}">
-                <a16:creationId xmlns:a16="http://schemas.microsoft.com/office/drawing/2014/main" id="{7DAAB71F-C055-476C-95D4-B4D367755B3F}"/>
+                <a16:creationId xmlns:a16="http://schemas.microsoft.com/office/drawing/2014/main" id="{DAA47760-C3D1-4E8F-954B-FA3545E4CE3F}"/>
               </a:ext>
             </a:extLst>
           </p:cNvPr>
@@ -2751,7 +2751,7 @@
           <p:cNvPr id="8" name="">
             <a:extLst xmlns:a="http://schemas.openxmlformats.org/drawingml/2006/main">
               <a:ext uri="{FF2B5EF4-FFF2-40B4-BE49-F238E27FC236}">
-                <a16:creationId xmlns:a16="http://schemas.microsoft.com/office/drawing/2014/main" id="{251D01D9-F0CD-4069-8AD9-4F28FDAD6AB9}"/>
+                <a16:creationId xmlns:a16="http://schemas.microsoft.com/office/drawing/2014/main" id="{9A6450C1-345B-4975-8898-28BAFF2C46BD}"/>
               </a:ext>
             </a:extLst>
           </p:cNvPr>
@@ -2808,7 +2808,7 @@
           <p:cNvPr id="9" name="">
             <a:extLst xmlns:a="http://schemas.openxmlformats.org/drawingml/2006/main">
               <a:ext uri="{FF2B5EF4-FFF2-40B4-BE49-F238E27FC236}">
-                <a16:creationId xmlns:a16="http://schemas.microsoft.com/office/drawing/2014/main" id="{EFF8BFA7-E583-4387-8834-87BDEF44546C}"/>
+                <a16:creationId xmlns:a16="http://schemas.microsoft.com/office/drawing/2014/main" id="{98021F29-7A7C-462F-ADA3-438CD279FAB2}"/>
               </a:ext>
             </a:extLst>
           </p:cNvPr>
@@ -2865,7 +2865,7 @@
           <p:cNvPr id="10" name="">
             <a:extLst xmlns:a="http://schemas.openxmlformats.org/drawingml/2006/main">
               <a:ext uri="{FF2B5EF4-FFF2-40B4-BE49-F238E27FC236}">
-                <a16:creationId xmlns:a16="http://schemas.microsoft.com/office/drawing/2014/main" id="{647882B5-F19B-42E8-9CA3-3094449CB72C}"/>
+                <a16:creationId xmlns:a16="http://schemas.microsoft.com/office/drawing/2014/main" id="{0BB6B3C0-2051-4535-82C7-B90278608C1A}"/>
               </a:ext>
             </a:extLst>
           </p:cNvPr>
@@ -2922,7 +2922,7 @@
           <p:cNvPr id="11" name="">
             <a:extLst xmlns:a="http://schemas.openxmlformats.org/drawingml/2006/main">
               <a:ext uri="{FF2B5EF4-FFF2-40B4-BE49-F238E27FC236}">
-                <a16:creationId xmlns:a16="http://schemas.microsoft.com/office/drawing/2014/main" id="{B721E406-273C-4BAA-8813-114C78630AF0}"/>
+                <a16:creationId xmlns:a16="http://schemas.microsoft.com/office/drawing/2014/main" id="{421CEB62-FEDE-4091-8D70-EB74C6C6BDA6}"/>
               </a:ext>
             </a:extLst>
           </p:cNvPr>
@@ -2979,7 +2979,7 @@
           <p:cNvPr id="12" name="">
             <a:extLst xmlns:a="http://schemas.openxmlformats.org/drawingml/2006/main">
               <a:ext uri="{FF2B5EF4-FFF2-40B4-BE49-F238E27FC236}">
-                <a16:creationId xmlns:a16="http://schemas.microsoft.com/office/drawing/2014/main" id="{3DE15CDB-0BA4-48EA-998C-5B0BDD148B04}"/>
+                <a16:creationId xmlns:a16="http://schemas.microsoft.com/office/drawing/2014/main" id="{D1B47A43-E9FD-489B-93FA-E2E24452C2E7}"/>
               </a:ext>
             </a:extLst>
           </p:cNvPr>
@@ -3036,7 +3036,7 @@
           <p:cNvPr id="13" name="">
             <a:extLst xmlns:a="http://schemas.openxmlformats.org/drawingml/2006/main">
               <a:ext uri="{FF2B5EF4-FFF2-40B4-BE49-F238E27FC236}">
-                <a16:creationId xmlns:a16="http://schemas.microsoft.com/office/drawing/2014/main" id="{D8A42E72-D53B-48B2-9E60-26CF4B8E215C}"/>
+                <a16:creationId xmlns:a16="http://schemas.microsoft.com/office/drawing/2014/main" id="{DDC70026-CA31-4092-81C4-2AB6D06EB7A3}"/>
               </a:ext>
             </a:extLst>
           </p:cNvPr>
@@ -3091,7 +3091,7 @@
     </p:spTree>
     <p:extLst>
       <p:ext uri="{BB962C8B-B14F-4D97-AF65-F5344CB8AC3E}">
-        <p14:creationId xmlns:p14="http://schemas.microsoft.com/office/powerpoint/2010/main" val="1435056150"/>
+        <p14:creationId xmlns:p14="http://schemas.microsoft.com/office/powerpoint/2010/main" val="384586757"/>
       </p:ext>
     </p:extLst>
   </p:cSld>
@@ -3292,7 +3292,7 @@
           <p:cNvPr id="19" name="">
             <a:extLst xmlns:a="http://schemas.openxmlformats.org/drawingml/2006/main">
               <a:ext uri="{FF2B5EF4-FFF2-40B4-BE49-F238E27FC236}">
-                <a16:creationId xmlns:a16="http://schemas.microsoft.com/office/drawing/2014/main" id="{4A0D6AA5-841D-43D5-AC67-3559EC03E6AC}"/>
+                <a16:creationId xmlns:a16="http://schemas.microsoft.com/office/drawing/2014/main" id="{B8B0C0E3-0323-4A91-A710-54A3E2AD05B8}"/>
               </a:ext>
             </a:extLst>
           </p:cNvPr>
@@ -3324,7 +3324,7 @@
           <p:cNvPr id="2" name="">
             <a:extLst xmlns:a="http://schemas.openxmlformats.org/drawingml/2006/main">
               <a:ext uri="{FF2B5EF4-FFF2-40B4-BE49-F238E27FC236}">
-                <a16:creationId xmlns:a16="http://schemas.microsoft.com/office/drawing/2014/main" id="{0FCD58AE-90D8-4669-8066-6776216DC7E1}"/>
+                <a16:creationId xmlns:a16="http://schemas.microsoft.com/office/drawing/2014/main" id="{4FCD671B-3CBF-4FEF-AC97-E6DE35A1C842}"/>
               </a:ext>
             </a:extLst>
           </p:cNvPr>
@@ -3381,7 +3381,7 @@
           <p:cNvPr id="3" name="">
             <a:extLst xmlns:a="http://schemas.openxmlformats.org/drawingml/2006/main">
               <a:ext uri="{FF2B5EF4-FFF2-40B4-BE49-F238E27FC236}">
-                <a16:creationId xmlns:a16="http://schemas.microsoft.com/office/drawing/2014/main" id="{0CF50637-D0B4-440D-88D5-7A728F451A86}"/>
+                <a16:creationId xmlns:a16="http://schemas.microsoft.com/office/drawing/2014/main" id="{CD14DE2B-AF70-4107-9F1F-7AD92B143C87}"/>
               </a:ext>
             </a:extLst>
           </p:cNvPr>
@@ -3413,7 +3413,7 @@
           <p:cNvPr id="4" name="">
             <a:extLst xmlns:a="http://schemas.openxmlformats.org/drawingml/2006/main">
               <a:ext uri="{FF2B5EF4-FFF2-40B4-BE49-F238E27FC236}">
-                <a16:creationId xmlns:a16="http://schemas.microsoft.com/office/drawing/2014/main" id="{82745B0B-4372-4503-B462-7AFFD86567A8}"/>
+                <a16:creationId xmlns:a16="http://schemas.microsoft.com/office/drawing/2014/main" id="{53043EB6-18AA-4C16-AFCC-FC0FA6D1F071}"/>
               </a:ext>
             </a:extLst>
           </p:cNvPr>
@@ -3470,7 +3470,7 @@
           <p:cNvPr id="5" name="">
             <a:extLst xmlns:a="http://schemas.openxmlformats.org/drawingml/2006/main">
               <a:ext uri="{FF2B5EF4-FFF2-40B4-BE49-F238E27FC236}">
-                <a16:creationId xmlns:a16="http://schemas.microsoft.com/office/drawing/2014/main" id="{61CE8AB8-E7D7-4EA0-8077-71D342D19779}"/>
+                <a16:creationId xmlns:a16="http://schemas.microsoft.com/office/drawing/2014/main" id="{FC9A6031-EF8F-4C8D-9759-EEA596193127}"/>
               </a:ext>
             </a:extLst>
           </p:cNvPr>
@@ -3527,7 +3527,7 @@
           <p:cNvPr id="6" name="">
             <a:extLst xmlns:a="http://schemas.openxmlformats.org/drawingml/2006/main">
               <a:ext uri="{FF2B5EF4-FFF2-40B4-BE49-F238E27FC236}">
-                <a16:creationId xmlns:a16="http://schemas.microsoft.com/office/drawing/2014/main" id="{CA1B4CD8-6143-4660-A614-D516ACF585E0}"/>
+                <a16:creationId xmlns:a16="http://schemas.microsoft.com/office/drawing/2014/main" id="{F9A51D3A-66CB-4894-BFDD-B061A7F39042}"/>
               </a:ext>
             </a:extLst>
           </p:cNvPr>
@@ -3584,7 +3584,7 @@
           <p:cNvPr id="7" name="">
             <a:extLst xmlns:a="http://schemas.openxmlformats.org/drawingml/2006/main">
               <a:ext uri="{FF2B5EF4-FFF2-40B4-BE49-F238E27FC236}">
-                <a16:creationId xmlns:a16="http://schemas.microsoft.com/office/drawing/2014/main" id="{BED58E1A-5D0F-4F0C-94A5-9B9D53F4725E}"/>
+                <a16:creationId xmlns:a16="http://schemas.microsoft.com/office/drawing/2014/main" id="{D8E91132-A6AD-4742-880A-9467614E0E07}"/>
               </a:ext>
             </a:extLst>
           </p:cNvPr>
@@ -3616,7 +3616,7 @@
           <p:cNvPr id="8" name="">
             <a:extLst xmlns:a="http://schemas.openxmlformats.org/drawingml/2006/main">
               <a:ext uri="{FF2B5EF4-FFF2-40B4-BE49-F238E27FC236}">
-                <a16:creationId xmlns:a16="http://schemas.microsoft.com/office/drawing/2014/main" id="{DA367219-C58D-4C27-B4B0-9ED92DEE98E1}"/>
+                <a16:creationId xmlns:a16="http://schemas.microsoft.com/office/drawing/2014/main" id="{C3588820-9DDD-476F-9099-5043AA55AF22}"/>
               </a:ext>
             </a:extLst>
           </p:cNvPr>
@@ -3673,7 +3673,7 @@
           <p:cNvPr id="9" name="">
             <a:extLst xmlns:a="http://schemas.openxmlformats.org/drawingml/2006/main">
               <a:ext uri="{FF2B5EF4-FFF2-40B4-BE49-F238E27FC236}">
-                <a16:creationId xmlns:a16="http://schemas.microsoft.com/office/drawing/2014/main" id="{F2BABD42-8EB1-48D6-9ADE-71B25F666AD3}"/>
+                <a16:creationId xmlns:a16="http://schemas.microsoft.com/office/drawing/2014/main" id="{B33CBADB-440D-4F09-A6B2-067B623F3805}"/>
               </a:ext>
             </a:extLst>
           </p:cNvPr>
@@ -3730,7 +3730,7 @@
           <p:cNvPr id="10" name="">
             <a:extLst xmlns:a="http://schemas.openxmlformats.org/drawingml/2006/main">
               <a:ext uri="{FF2B5EF4-FFF2-40B4-BE49-F238E27FC236}">
-                <a16:creationId xmlns:a16="http://schemas.microsoft.com/office/drawing/2014/main" id="{B530C563-E0D5-4E7E-A9DC-2338EC7BBD88}"/>
+                <a16:creationId xmlns:a16="http://schemas.microsoft.com/office/drawing/2014/main" id="{2730B5E2-EC49-4D4E-B2B5-566171A3D542}"/>
               </a:ext>
             </a:extLst>
           </p:cNvPr>
@@ -3787,7 +3787,7 @@
           <p:cNvPr id="11" name="">
             <a:extLst xmlns:a="http://schemas.openxmlformats.org/drawingml/2006/main">
               <a:ext uri="{FF2B5EF4-FFF2-40B4-BE49-F238E27FC236}">
-                <a16:creationId xmlns:a16="http://schemas.microsoft.com/office/drawing/2014/main" id="{C2CBEE45-00E2-4136-A9A8-4654379DFB05}"/>
+                <a16:creationId xmlns:a16="http://schemas.microsoft.com/office/drawing/2014/main" id="{0DBBFA26-ECBF-4653-92E1-53D2DB042F89}"/>
               </a:ext>
             </a:extLst>
           </p:cNvPr>
@@ -3821,7 +3821,7 @@
           <p:cNvPr id="12" name="">
             <a:extLst xmlns:a="http://schemas.openxmlformats.org/drawingml/2006/main">
               <a:ext uri="{FF2B5EF4-FFF2-40B4-BE49-F238E27FC236}">
-                <a16:creationId xmlns:a16="http://schemas.microsoft.com/office/drawing/2014/main" id="{07AF47E4-948E-4F82-BD1E-913AAC128784}"/>
+                <a16:creationId xmlns:a16="http://schemas.microsoft.com/office/drawing/2014/main" id="{A6CEAC39-2450-479E-9098-DE891FFEB1AC}"/>
               </a:ext>
             </a:extLst>
           </p:cNvPr>
@@ -3878,7 +3878,7 @@
           <p:cNvPr id="13" name="">
             <a:extLst xmlns:a="http://schemas.openxmlformats.org/drawingml/2006/main">
               <a:ext uri="{FF2B5EF4-FFF2-40B4-BE49-F238E27FC236}">
-                <a16:creationId xmlns:a16="http://schemas.microsoft.com/office/drawing/2014/main" id="{F9B405AC-707A-413C-B3D8-25ED9F572C5A}"/>
+                <a16:creationId xmlns:a16="http://schemas.microsoft.com/office/drawing/2014/main" id="{B01086AC-D47F-43B3-BC05-2B1085369C84}"/>
               </a:ext>
             </a:extLst>
           </p:cNvPr>
@@ -3935,7 +3935,7 @@
           <p:cNvPr id="14" name="">
             <a:extLst xmlns:a="http://schemas.openxmlformats.org/drawingml/2006/main">
               <a:ext uri="{FF2B5EF4-FFF2-40B4-BE49-F238E27FC236}">
-                <a16:creationId xmlns:a16="http://schemas.microsoft.com/office/drawing/2014/main" id="{E063F511-CA9F-48D8-9443-9E418853E2D7}"/>
+                <a16:creationId xmlns:a16="http://schemas.microsoft.com/office/drawing/2014/main" id="{606551BE-C12B-49C8-B71D-338D142AE27D}"/>
               </a:ext>
             </a:extLst>
           </p:cNvPr>
@@ -3992,7 +3992,7 @@
           <p:cNvPr id="15" name="">
             <a:extLst xmlns:a="http://schemas.openxmlformats.org/drawingml/2006/main">
               <a:ext uri="{FF2B5EF4-FFF2-40B4-BE49-F238E27FC236}">
-                <a16:creationId xmlns:a16="http://schemas.microsoft.com/office/drawing/2014/main" id="{C7405BFA-1605-43A7-AC30-AE2AEB34C544}"/>
+                <a16:creationId xmlns:a16="http://schemas.microsoft.com/office/drawing/2014/main" id="{594E78DD-F889-4A91-B856-DF9FEAF213A5}"/>
               </a:ext>
             </a:extLst>
           </p:cNvPr>
@@ -4026,7 +4026,7 @@
           <p:cNvPr id="16" name="">
             <a:extLst xmlns:a="http://schemas.openxmlformats.org/drawingml/2006/main">
               <a:ext uri="{FF2B5EF4-FFF2-40B4-BE49-F238E27FC236}">
-                <a16:creationId xmlns:a16="http://schemas.microsoft.com/office/drawing/2014/main" id="{78F48739-E09F-40A5-B8A7-82ACC05D56C2}"/>
+                <a16:creationId xmlns:a16="http://schemas.microsoft.com/office/drawing/2014/main" id="{1484635F-ADE7-42A6-BD87-D5332384951B}"/>
               </a:ext>
             </a:extLst>
           </p:cNvPr>
@@ -4083,7 +4083,7 @@
           <p:cNvPr id="17" name="">
             <a:extLst xmlns:a="http://schemas.openxmlformats.org/drawingml/2006/main">
               <a:ext uri="{FF2B5EF4-FFF2-40B4-BE49-F238E27FC236}">
-                <a16:creationId xmlns:a16="http://schemas.microsoft.com/office/drawing/2014/main" id="{1A307077-204D-41ED-AEE2-63FACF11F17F}"/>
+                <a16:creationId xmlns:a16="http://schemas.microsoft.com/office/drawing/2014/main" id="{BCA7067E-0B89-45D9-8A36-1A272441FC54}"/>
               </a:ext>
             </a:extLst>
           </p:cNvPr>
@@ -4140,7 +4140,7 @@
           <p:cNvPr id="18" name="">
             <a:extLst xmlns:a="http://schemas.openxmlformats.org/drawingml/2006/main">
               <a:ext uri="{FF2B5EF4-FFF2-40B4-BE49-F238E27FC236}">
-                <a16:creationId xmlns:a16="http://schemas.microsoft.com/office/drawing/2014/main" id="{082F12D4-B0EA-498D-BCD1-FFEB0AEB2B93}"/>
+                <a16:creationId xmlns:a16="http://schemas.microsoft.com/office/drawing/2014/main" id="{71738955-B330-485E-B1DC-A7640A5CB64C}"/>
               </a:ext>
             </a:extLst>
           </p:cNvPr>
@@ -4195,7 +4195,7 @@
     </p:spTree>
     <p:extLst>
       <p:ext uri="{BB962C8B-B14F-4D97-AF65-F5344CB8AC3E}">
-        <p14:creationId xmlns:p14="http://schemas.microsoft.com/office/powerpoint/2010/main" val="1731067185"/>
+        <p14:creationId xmlns:p14="http://schemas.microsoft.com/office/powerpoint/2010/main" val="802980501"/>
       </p:ext>
     </p:extLst>
   </p:cSld>
@@ -4350,7 +4350,7 @@
           <p:cNvPr id="23" name="">
             <a:extLst xmlns:a="http://schemas.openxmlformats.org/drawingml/2006/main">
               <a:ext uri="{FF2B5EF4-FFF2-40B4-BE49-F238E27FC236}">
-                <a16:creationId xmlns:a16="http://schemas.microsoft.com/office/drawing/2014/main" id="{427B2C19-F137-4F3E-A041-3FE407F71076}"/>
+                <a16:creationId xmlns:a16="http://schemas.microsoft.com/office/drawing/2014/main" id="{65D530E9-3C3D-48A2-ADAA-975A5A27BA63}"/>
               </a:ext>
             </a:extLst>
           </p:cNvPr>
@@ -4382,7 +4382,7 @@
           <p:cNvPr id="2" name="">
             <a:extLst xmlns:a="http://schemas.openxmlformats.org/drawingml/2006/main">
               <a:ext uri="{FF2B5EF4-FFF2-40B4-BE49-F238E27FC236}">
-                <a16:creationId xmlns:a16="http://schemas.microsoft.com/office/drawing/2014/main" id="{1422545E-830A-48BE-B284-E4D1929ACF08}"/>
+                <a16:creationId xmlns:a16="http://schemas.microsoft.com/office/drawing/2014/main" id="{F263A09E-417C-4B27-A815-6569FAB885FE}"/>
               </a:ext>
             </a:extLst>
           </p:cNvPr>
@@ -4439,7 +4439,7 @@
           <p:cNvPr id="3" name="">
             <a:extLst xmlns:a="http://schemas.openxmlformats.org/drawingml/2006/main">
               <a:ext uri="{FF2B5EF4-FFF2-40B4-BE49-F238E27FC236}">
-                <a16:creationId xmlns:a16="http://schemas.microsoft.com/office/drawing/2014/main" id="{FC861553-A2FC-4240-A012-E5CD4D927EFA}"/>
+                <a16:creationId xmlns:a16="http://schemas.microsoft.com/office/drawing/2014/main" id="{3B29745C-764A-499F-AFE2-95A1E4B5169B}"/>
               </a:ext>
             </a:extLst>
           </p:cNvPr>
@@ -4471,7 +4471,7 @@
           <p:cNvPr id="4" name="">
             <a:extLst xmlns:a="http://schemas.openxmlformats.org/drawingml/2006/main">
               <a:ext uri="{FF2B5EF4-FFF2-40B4-BE49-F238E27FC236}">
-                <a16:creationId xmlns:a16="http://schemas.microsoft.com/office/drawing/2014/main" id="{3A2CE9A3-A524-4DD6-A0CE-40D8A737C717}"/>
+                <a16:creationId xmlns:a16="http://schemas.microsoft.com/office/drawing/2014/main" id="{C75DE2CA-54F7-4BDB-AA9C-173AA72D69B2}"/>
               </a:ext>
             </a:extLst>
           </p:cNvPr>
@@ -4528,7 +4528,7 @@
           <p:cNvPr id="5" name="">
             <a:extLst xmlns:a="http://schemas.openxmlformats.org/drawingml/2006/main">
               <a:ext uri="{FF2B5EF4-FFF2-40B4-BE49-F238E27FC236}">
-                <a16:creationId xmlns:a16="http://schemas.microsoft.com/office/drawing/2014/main" id="{1CFA0D92-C5EC-46C4-BA59-F53909B1D51B}"/>
+                <a16:creationId xmlns:a16="http://schemas.microsoft.com/office/drawing/2014/main" id="{55D46A77-73F9-4AEE-9548-890FF609F6C4}"/>
               </a:ext>
             </a:extLst>
           </p:cNvPr>
@@ -4585,7 +4585,7 @@
           <p:cNvPr id="6" name="">
             <a:extLst xmlns:a="http://schemas.openxmlformats.org/drawingml/2006/main">
               <a:ext uri="{FF2B5EF4-FFF2-40B4-BE49-F238E27FC236}">
-                <a16:creationId xmlns:a16="http://schemas.microsoft.com/office/drawing/2014/main" id="{05514810-9E25-43DA-8EA1-B0EB76BFCA7D}"/>
+                <a16:creationId xmlns:a16="http://schemas.microsoft.com/office/drawing/2014/main" id="{6DB1F65A-B8EF-4D95-9B73-0EA020970046}"/>
               </a:ext>
             </a:extLst>
           </p:cNvPr>
@@ -4642,7 +4642,7 @@
           <p:cNvPr id="7" name="">
             <a:extLst xmlns:a="http://schemas.openxmlformats.org/drawingml/2006/main">
               <a:ext uri="{FF2B5EF4-FFF2-40B4-BE49-F238E27FC236}">
-                <a16:creationId xmlns:a16="http://schemas.microsoft.com/office/drawing/2014/main" id="{D8AA4C43-4A9C-4814-A4DC-51FFE0026BD7}"/>
+                <a16:creationId xmlns:a16="http://schemas.microsoft.com/office/drawing/2014/main" id="{C5BAEDF1-158C-4365-81B7-FAF25AEEEFE8}"/>
               </a:ext>
             </a:extLst>
           </p:cNvPr>
@@ -4674,7 +4674,7 @@
           <p:cNvPr id="8" name="">
             <a:extLst xmlns:a="http://schemas.openxmlformats.org/drawingml/2006/main">
               <a:ext uri="{FF2B5EF4-FFF2-40B4-BE49-F238E27FC236}">
-                <a16:creationId xmlns:a16="http://schemas.microsoft.com/office/drawing/2014/main" id="{FD074907-6629-4B3C-A280-FF0BDA578ECF}"/>
+                <a16:creationId xmlns:a16="http://schemas.microsoft.com/office/drawing/2014/main" id="{5C0C774E-4D27-46A5-A525-2E38A45025AF}"/>
               </a:ext>
             </a:extLst>
           </p:cNvPr>
@@ -4731,7 +4731,7 @@
           <p:cNvPr id="9" name="">
             <a:extLst xmlns:a="http://schemas.openxmlformats.org/drawingml/2006/main">
               <a:ext uri="{FF2B5EF4-FFF2-40B4-BE49-F238E27FC236}">
-                <a16:creationId xmlns:a16="http://schemas.microsoft.com/office/drawing/2014/main" id="{2425DA47-D348-4DA2-B047-DD087C41E870}"/>
+                <a16:creationId xmlns:a16="http://schemas.microsoft.com/office/drawing/2014/main" id="{B0499839-A9E2-4197-AEDE-40BBFAB97297}"/>
               </a:ext>
             </a:extLst>
           </p:cNvPr>
@@ -4788,7 +4788,7 @@
           <p:cNvPr id="10" name="">
             <a:extLst xmlns:a="http://schemas.openxmlformats.org/drawingml/2006/main">
               <a:ext uri="{FF2B5EF4-FFF2-40B4-BE49-F238E27FC236}">
-                <a16:creationId xmlns:a16="http://schemas.microsoft.com/office/drawing/2014/main" id="{691F559B-B9DE-44BD-A042-21E35E0DDCAD}"/>
+                <a16:creationId xmlns:a16="http://schemas.microsoft.com/office/drawing/2014/main" id="{D3071304-C0E0-4DC6-B688-51DE8A027367}"/>
               </a:ext>
             </a:extLst>
           </p:cNvPr>
@@ -4822,7 +4822,7 @@
           <p:cNvPr id="11" name="">
             <a:extLst xmlns:a="http://schemas.openxmlformats.org/drawingml/2006/main">
               <a:ext uri="{FF2B5EF4-FFF2-40B4-BE49-F238E27FC236}">
-                <a16:creationId xmlns:a16="http://schemas.microsoft.com/office/drawing/2014/main" id="{AE13FA5D-5A6C-46CC-BE15-9D6B00C0A20B}"/>
+                <a16:creationId xmlns:a16="http://schemas.microsoft.com/office/drawing/2014/main" id="{28957E66-5DC5-4E53-99CD-E15498B268D2}"/>
               </a:ext>
             </a:extLst>
           </p:cNvPr>
@@ -4854,7 +4854,7 @@
           <p:cNvPr id="12" name="">
             <a:extLst xmlns:a="http://schemas.openxmlformats.org/drawingml/2006/main">
               <a:ext uri="{FF2B5EF4-FFF2-40B4-BE49-F238E27FC236}">
-                <a16:creationId xmlns:a16="http://schemas.microsoft.com/office/drawing/2014/main" id="{0218855F-3D6E-4CDE-B936-977992535542}"/>
+                <a16:creationId xmlns:a16="http://schemas.microsoft.com/office/drawing/2014/main" id="{C926421D-C22F-407B-AF4B-A8A8A5E306EF}"/>
               </a:ext>
             </a:extLst>
           </p:cNvPr>
@@ -4911,7 +4911,7 @@
           <p:cNvPr id="13" name="">
             <a:extLst xmlns:a="http://schemas.openxmlformats.org/drawingml/2006/main">
               <a:ext uri="{FF2B5EF4-FFF2-40B4-BE49-F238E27FC236}">
-                <a16:creationId xmlns:a16="http://schemas.microsoft.com/office/drawing/2014/main" id="{074C0A08-88A2-421A-A5D4-2A39AFF3B97B}"/>
+                <a16:creationId xmlns:a16="http://schemas.microsoft.com/office/drawing/2014/main" id="{ED515B8B-93CE-417C-B657-5FBD71EC21B8}"/>
               </a:ext>
             </a:extLst>
           </p:cNvPr>
@@ -4968,7 +4968,7 @@
           <p:cNvPr id="14" name="">
             <a:extLst xmlns:a="http://schemas.openxmlformats.org/drawingml/2006/main">
               <a:ext uri="{FF2B5EF4-FFF2-40B4-BE49-F238E27FC236}">
-                <a16:creationId xmlns:a16="http://schemas.microsoft.com/office/drawing/2014/main" id="{B904BFC3-0895-43F2-8F80-EF1109D14B69}"/>
+                <a16:creationId xmlns:a16="http://schemas.microsoft.com/office/drawing/2014/main" id="{292872BF-411C-4015-8BFD-1B0EC70234E6}"/>
               </a:ext>
             </a:extLst>
           </p:cNvPr>
@@ -5002,7 +5002,7 @@
           <p:cNvPr id="15" name="">
             <a:extLst xmlns:a="http://schemas.openxmlformats.org/drawingml/2006/main">
               <a:ext uri="{FF2B5EF4-FFF2-40B4-BE49-F238E27FC236}">
-                <a16:creationId xmlns:a16="http://schemas.microsoft.com/office/drawing/2014/main" id="{00C4AE2D-956D-45F2-BE20-C8B0BB20C6E5}"/>
+                <a16:creationId xmlns:a16="http://schemas.microsoft.com/office/drawing/2014/main" id="{A1602B21-D36F-4649-8544-20557EA01316}"/>
               </a:ext>
             </a:extLst>
           </p:cNvPr>
@@ -5034,7 +5034,7 @@
           <p:cNvPr id="16" name="">
             <a:extLst xmlns:a="http://schemas.openxmlformats.org/drawingml/2006/main">
               <a:ext uri="{FF2B5EF4-FFF2-40B4-BE49-F238E27FC236}">
-                <a16:creationId xmlns:a16="http://schemas.microsoft.com/office/drawing/2014/main" id="{C5577399-B340-41E5-B433-99F3AD5F251A}"/>
+                <a16:creationId xmlns:a16="http://schemas.microsoft.com/office/drawing/2014/main" id="{0AD0B7D8-E7AD-4A48-9860-101591551781}"/>
               </a:ext>
             </a:extLst>
           </p:cNvPr>
@@ -5091,7 +5091,7 @@
           <p:cNvPr id="17" name="">
             <a:extLst xmlns:a="http://schemas.openxmlformats.org/drawingml/2006/main">
               <a:ext uri="{FF2B5EF4-FFF2-40B4-BE49-F238E27FC236}">
-                <a16:creationId xmlns:a16="http://schemas.microsoft.com/office/drawing/2014/main" id="{F91E7CF1-D763-4F8F-A591-B1CE5AE75406}"/>
+                <a16:creationId xmlns:a16="http://schemas.microsoft.com/office/drawing/2014/main" id="{1AE8092F-C2E4-4140-B41E-D412B62D9FBF}"/>
               </a:ext>
             </a:extLst>
           </p:cNvPr>
@@ -5148,7 +5148,7 @@
           <p:cNvPr id="18" name="">
             <a:extLst xmlns:a="http://schemas.openxmlformats.org/drawingml/2006/main">
               <a:ext uri="{FF2B5EF4-FFF2-40B4-BE49-F238E27FC236}">
-                <a16:creationId xmlns:a16="http://schemas.microsoft.com/office/drawing/2014/main" id="{CA62D9C0-CD4B-4122-A37C-C7E2DA9F0CC9}"/>
+                <a16:creationId xmlns:a16="http://schemas.microsoft.com/office/drawing/2014/main" id="{3F8F43AB-54C9-4ADC-9475-D9028A36CC66}"/>
               </a:ext>
             </a:extLst>
           </p:cNvPr>
@@ -5182,7 +5182,7 @@
           <p:cNvPr id="19" name="">
             <a:extLst xmlns:a="http://schemas.openxmlformats.org/drawingml/2006/main">
               <a:ext uri="{FF2B5EF4-FFF2-40B4-BE49-F238E27FC236}">
-                <a16:creationId xmlns:a16="http://schemas.microsoft.com/office/drawing/2014/main" id="{BD4B5323-B0F9-41A6-8EEA-6F33C21B0CA7}"/>
+                <a16:creationId xmlns:a16="http://schemas.microsoft.com/office/drawing/2014/main" id="{76FBF2BA-98BD-4028-8B3D-A60755FBC1F2}"/>
               </a:ext>
             </a:extLst>
           </p:cNvPr>
@@ -5214,7 +5214,7 @@
           <p:cNvPr id="20" name="">
             <a:extLst xmlns:a="http://schemas.openxmlformats.org/drawingml/2006/main">
               <a:ext uri="{FF2B5EF4-FFF2-40B4-BE49-F238E27FC236}">
-                <a16:creationId xmlns:a16="http://schemas.microsoft.com/office/drawing/2014/main" id="{D80038BA-D145-426C-89A2-338E325331E2}"/>
+                <a16:creationId xmlns:a16="http://schemas.microsoft.com/office/drawing/2014/main" id="{39CE29C5-6DC3-49E3-BAE8-B43A6E52C83B}"/>
               </a:ext>
             </a:extLst>
           </p:cNvPr>
@@ -5271,7 +5271,7 @@
           <p:cNvPr id="21" name="">
             <a:extLst xmlns:a="http://schemas.openxmlformats.org/drawingml/2006/main">
               <a:ext uri="{FF2B5EF4-FFF2-40B4-BE49-F238E27FC236}">
-                <a16:creationId xmlns:a16="http://schemas.microsoft.com/office/drawing/2014/main" id="{0B2D96D6-889B-43E0-926A-BA440AB639E8}"/>
+                <a16:creationId xmlns:a16="http://schemas.microsoft.com/office/drawing/2014/main" id="{25ADD990-C1D4-437D-8866-F98548190396}"/>
               </a:ext>
             </a:extLst>
           </p:cNvPr>
@@ -5328,7 +5328,7 @@
           <p:cNvPr id="22" name="">
             <a:extLst xmlns:a="http://schemas.openxmlformats.org/drawingml/2006/main">
               <a:ext uri="{FF2B5EF4-FFF2-40B4-BE49-F238E27FC236}">
-                <a16:creationId xmlns:a16="http://schemas.microsoft.com/office/drawing/2014/main" id="{99B82E5D-C109-4AE8-A46B-EA75E6641F06}"/>
+                <a16:creationId xmlns:a16="http://schemas.microsoft.com/office/drawing/2014/main" id="{BF9DA20E-72D1-4BA0-9EFE-A17B633A7AC2}"/>
               </a:ext>
             </a:extLst>
           </p:cNvPr>
@@ -5383,7 +5383,7 @@
     </p:spTree>
     <p:extLst>
       <p:ext uri="{BB962C8B-B14F-4D97-AF65-F5344CB8AC3E}">
-        <p14:creationId xmlns:p14="http://schemas.microsoft.com/office/powerpoint/2010/main" val="297541190"/>
+        <p14:creationId xmlns:p14="http://schemas.microsoft.com/office/powerpoint/2010/main" val="382923103"/>
       </p:ext>
     </p:extLst>
   </p:cSld>
@@ -5584,7 +5584,7 @@
           <p:cNvPr id="23" name="">
             <a:extLst xmlns:a="http://schemas.openxmlformats.org/drawingml/2006/main">
               <a:ext uri="{FF2B5EF4-FFF2-40B4-BE49-F238E27FC236}">
-                <a16:creationId xmlns:a16="http://schemas.microsoft.com/office/drawing/2014/main" id="{FD3CBCA1-9498-49C9-B46E-60042B6A20B2}"/>
+                <a16:creationId xmlns:a16="http://schemas.microsoft.com/office/drawing/2014/main" id="{8CCCB731-48FF-4518-93D2-EA55B72596BE}"/>
               </a:ext>
             </a:extLst>
           </p:cNvPr>
@@ -5616,7 +5616,7 @@
           <p:cNvPr id="2" name="">
             <a:extLst xmlns:a="http://schemas.openxmlformats.org/drawingml/2006/main">
               <a:ext uri="{FF2B5EF4-FFF2-40B4-BE49-F238E27FC236}">
-                <a16:creationId xmlns:a16="http://schemas.microsoft.com/office/drawing/2014/main" id="{8665DDF3-464C-4811-900F-A932EF859450}"/>
+                <a16:creationId xmlns:a16="http://schemas.microsoft.com/office/drawing/2014/main" id="{36E1FEFE-9E5F-4DD7-BE40-FE8680FD61E9}"/>
               </a:ext>
             </a:extLst>
           </p:cNvPr>
@@ -5673,7 +5673,7 @@
           <p:cNvPr id="3" name="">
             <a:extLst xmlns:a="http://schemas.openxmlformats.org/drawingml/2006/main">
               <a:ext uri="{FF2B5EF4-FFF2-40B4-BE49-F238E27FC236}">
-                <a16:creationId xmlns:a16="http://schemas.microsoft.com/office/drawing/2014/main" id="{1AA25977-534B-403D-A69B-BA8B6E675E43}"/>
+                <a16:creationId xmlns:a16="http://schemas.microsoft.com/office/drawing/2014/main" id="{0F879F08-FF6A-436A-B25E-A1405C2341F3}"/>
               </a:ext>
             </a:extLst>
           </p:cNvPr>
@@ -5705,7 +5705,7 @@
           <p:cNvPr id="4" name="">
             <a:extLst xmlns:a="http://schemas.openxmlformats.org/drawingml/2006/main">
               <a:ext uri="{FF2B5EF4-FFF2-40B4-BE49-F238E27FC236}">
-                <a16:creationId xmlns:a16="http://schemas.microsoft.com/office/drawing/2014/main" id="{CFD79D8D-F704-4B40-BDB3-23511F0F68A9}"/>
+                <a16:creationId xmlns:a16="http://schemas.microsoft.com/office/drawing/2014/main" id="{A968F0F1-7743-4247-84D6-F965CF00BFE9}"/>
               </a:ext>
             </a:extLst>
           </p:cNvPr>
@@ -5762,7 +5762,7 @@
           <p:cNvPr id="5" name="">
             <a:extLst xmlns:a="http://schemas.openxmlformats.org/drawingml/2006/main">
               <a:ext uri="{FF2B5EF4-FFF2-40B4-BE49-F238E27FC236}">
-                <a16:creationId xmlns:a16="http://schemas.microsoft.com/office/drawing/2014/main" id="{8D90CEAE-AA2E-4325-ADBD-D5D4E1C982FB}"/>
+                <a16:creationId xmlns:a16="http://schemas.microsoft.com/office/drawing/2014/main" id="{846A6BC4-E1A3-4655-875F-D5CD24C4943F}"/>
               </a:ext>
             </a:extLst>
           </p:cNvPr>
@@ -5819,7 +5819,7 @@
           <p:cNvPr id="6" name="">
             <a:extLst xmlns:a="http://schemas.openxmlformats.org/drawingml/2006/main">
               <a:ext uri="{FF2B5EF4-FFF2-40B4-BE49-F238E27FC236}">
-                <a16:creationId xmlns:a16="http://schemas.microsoft.com/office/drawing/2014/main" id="{9E65CC6C-1C25-4C08-97EE-DE37F6993D7C}"/>
+                <a16:creationId xmlns:a16="http://schemas.microsoft.com/office/drawing/2014/main" id="{6F166253-C007-4BE6-BBAD-05EA7E9F70FF}"/>
               </a:ext>
             </a:extLst>
           </p:cNvPr>
@@ -5876,7 +5876,7 @@
           <p:cNvPr id="7" name="">
             <a:extLst xmlns:a="http://schemas.openxmlformats.org/drawingml/2006/main">
               <a:ext uri="{FF2B5EF4-FFF2-40B4-BE49-F238E27FC236}">
-                <a16:creationId xmlns:a16="http://schemas.microsoft.com/office/drawing/2014/main" id="{69527AD1-799C-400A-B951-B16CE9A1DF34}"/>
+                <a16:creationId xmlns:a16="http://schemas.microsoft.com/office/drawing/2014/main" id="{3CA511B4-A0A9-4431-84FC-D8C4BDBDBDCD}"/>
               </a:ext>
             </a:extLst>
           </p:cNvPr>
@@ -5908,7 +5908,7 @@
           <p:cNvPr id="8" name="">
             <a:extLst xmlns:a="http://schemas.openxmlformats.org/drawingml/2006/main">
               <a:ext uri="{FF2B5EF4-FFF2-40B4-BE49-F238E27FC236}">
-                <a16:creationId xmlns:a16="http://schemas.microsoft.com/office/drawing/2014/main" id="{15B29E0A-7297-4C47-B671-68C18205FF67}"/>
+                <a16:creationId xmlns:a16="http://schemas.microsoft.com/office/drawing/2014/main" id="{45393F50-80F3-4B0E-8E94-BDD04B6A2320}"/>
               </a:ext>
             </a:extLst>
           </p:cNvPr>
@@ -5965,7 +5965,7 @@
           <p:cNvPr id="9" name="">
             <a:extLst xmlns:a="http://schemas.openxmlformats.org/drawingml/2006/main">
               <a:ext uri="{FF2B5EF4-FFF2-40B4-BE49-F238E27FC236}">
-                <a16:creationId xmlns:a16="http://schemas.microsoft.com/office/drawing/2014/main" id="{56524EAD-9DBE-46D8-9FBB-C7541D4DD0F9}"/>
+                <a16:creationId xmlns:a16="http://schemas.microsoft.com/office/drawing/2014/main" id="{86F8431B-0DB9-4643-8F43-DBBED113E589}"/>
               </a:ext>
             </a:extLst>
           </p:cNvPr>
@@ -6022,7 +6022,7 @@
           <p:cNvPr id="10" name="">
             <a:extLst xmlns:a="http://schemas.openxmlformats.org/drawingml/2006/main">
               <a:ext uri="{FF2B5EF4-FFF2-40B4-BE49-F238E27FC236}">
-                <a16:creationId xmlns:a16="http://schemas.microsoft.com/office/drawing/2014/main" id="{555F07FB-377F-451A-9A37-E87963658BCF}"/>
+                <a16:creationId xmlns:a16="http://schemas.microsoft.com/office/drawing/2014/main" id="{230C1447-E7F6-4E5A-8379-CFF312DC5AAD}"/>
               </a:ext>
             </a:extLst>
           </p:cNvPr>
@@ -6056,7 +6056,7 @@
           <p:cNvPr id="11" name="">
             <a:extLst xmlns:a="http://schemas.openxmlformats.org/drawingml/2006/main">
               <a:ext uri="{FF2B5EF4-FFF2-40B4-BE49-F238E27FC236}">
-                <a16:creationId xmlns:a16="http://schemas.microsoft.com/office/drawing/2014/main" id="{E084833D-32DA-4BC8-9F5F-EA5C4D465BC8}"/>
+                <a16:creationId xmlns:a16="http://schemas.microsoft.com/office/drawing/2014/main" id="{E682D16F-5BC6-48CC-A805-CF06EF33931F}"/>
               </a:ext>
             </a:extLst>
           </p:cNvPr>
@@ -6088,7 +6088,7 @@
           <p:cNvPr id="12" name="">
             <a:extLst xmlns:a="http://schemas.openxmlformats.org/drawingml/2006/main">
               <a:ext uri="{FF2B5EF4-FFF2-40B4-BE49-F238E27FC236}">
-                <a16:creationId xmlns:a16="http://schemas.microsoft.com/office/drawing/2014/main" id="{0452B757-5AD5-4035-9B3D-52E2519AE4C4}"/>
+                <a16:creationId xmlns:a16="http://schemas.microsoft.com/office/drawing/2014/main" id="{58DE0D91-DE6B-436E-A9E0-4AAB2ABB335C}"/>
               </a:ext>
             </a:extLst>
           </p:cNvPr>
@@ -6145,7 +6145,7 @@
           <p:cNvPr id="13" name="">
             <a:extLst xmlns:a="http://schemas.openxmlformats.org/drawingml/2006/main">
               <a:ext uri="{FF2B5EF4-FFF2-40B4-BE49-F238E27FC236}">
-                <a16:creationId xmlns:a16="http://schemas.microsoft.com/office/drawing/2014/main" id="{92D16DE2-90C5-4344-B980-993226789975}"/>
+                <a16:creationId xmlns:a16="http://schemas.microsoft.com/office/drawing/2014/main" id="{25B2E648-C0ED-425E-A044-735CAD641DF7}"/>
               </a:ext>
             </a:extLst>
           </p:cNvPr>
@@ -6202,7 +6202,7 @@
           <p:cNvPr id="14" name="">
             <a:extLst xmlns:a="http://schemas.openxmlformats.org/drawingml/2006/main">
               <a:ext uri="{FF2B5EF4-FFF2-40B4-BE49-F238E27FC236}">
-                <a16:creationId xmlns:a16="http://schemas.microsoft.com/office/drawing/2014/main" id="{ABA126CD-27B5-401D-8779-0B3E42CF533B}"/>
+                <a16:creationId xmlns:a16="http://schemas.microsoft.com/office/drawing/2014/main" id="{54C5923B-322F-417E-9830-93A089A2CC99}"/>
               </a:ext>
             </a:extLst>
           </p:cNvPr>
@@ -6236,7 +6236,7 @@
           <p:cNvPr id="15" name="">
             <a:extLst xmlns:a="http://schemas.openxmlformats.org/drawingml/2006/main">
               <a:ext uri="{FF2B5EF4-FFF2-40B4-BE49-F238E27FC236}">
-                <a16:creationId xmlns:a16="http://schemas.microsoft.com/office/drawing/2014/main" id="{DDC453BB-37CC-42FC-9D78-5580B5BCEEC2}"/>
+                <a16:creationId xmlns:a16="http://schemas.microsoft.com/office/drawing/2014/main" id="{14C4DB57-4A84-4045-892F-3CBE8A78ED48}"/>
               </a:ext>
             </a:extLst>
           </p:cNvPr>
@@ -6268,7 +6268,7 @@
           <p:cNvPr id="16" name="">
             <a:extLst xmlns:a="http://schemas.openxmlformats.org/drawingml/2006/main">
               <a:ext uri="{FF2B5EF4-FFF2-40B4-BE49-F238E27FC236}">
-                <a16:creationId xmlns:a16="http://schemas.microsoft.com/office/drawing/2014/main" id="{F0945FB0-3A80-49EE-B103-0AE4121FF5BB}"/>
+                <a16:creationId xmlns:a16="http://schemas.microsoft.com/office/drawing/2014/main" id="{DCA7F4F3-DD49-48EC-AC5E-FE27D9B5751F}"/>
               </a:ext>
             </a:extLst>
           </p:cNvPr>
@@ -6325,7 +6325,7 @@
           <p:cNvPr id="17" name="">
             <a:extLst xmlns:a="http://schemas.openxmlformats.org/drawingml/2006/main">
               <a:ext uri="{FF2B5EF4-FFF2-40B4-BE49-F238E27FC236}">
-                <a16:creationId xmlns:a16="http://schemas.microsoft.com/office/drawing/2014/main" id="{B81DCD93-64BB-4483-9CB9-B55C2FE965E8}"/>
+                <a16:creationId xmlns:a16="http://schemas.microsoft.com/office/drawing/2014/main" id="{A194F579-E316-42F6-8E3D-62C6C2876F7B}"/>
               </a:ext>
             </a:extLst>
           </p:cNvPr>
@@ -6382,7 +6382,7 @@
           <p:cNvPr id="18" name="">
             <a:extLst xmlns:a="http://schemas.openxmlformats.org/drawingml/2006/main">
               <a:ext uri="{FF2B5EF4-FFF2-40B4-BE49-F238E27FC236}">
-                <a16:creationId xmlns:a16="http://schemas.microsoft.com/office/drawing/2014/main" id="{90113C04-9B99-49D9-82CB-404540467B72}"/>
+                <a16:creationId xmlns:a16="http://schemas.microsoft.com/office/drawing/2014/main" id="{E5A3FB8F-58D1-46DF-B585-1B0553C57015}"/>
               </a:ext>
             </a:extLst>
           </p:cNvPr>
@@ -6416,7 +6416,7 @@
           <p:cNvPr id="19" name="">
             <a:extLst xmlns:a="http://schemas.openxmlformats.org/drawingml/2006/main">
               <a:ext uri="{FF2B5EF4-FFF2-40B4-BE49-F238E27FC236}">
-                <a16:creationId xmlns:a16="http://schemas.microsoft.com/office/drawing/2014/main" id="{3A5E0F28-F56A-4B56-B212-524252BBE495}"/>
+                <a16:creationId xmlns:a16="http://schemas.microsoft.com/office/drawing/2014/main" id="{F9690D19-843C-4E94-8430-782E291DE32B}"/>
               </a:ext>
             </a:extLst>
           </p:cNvPr>
@@ -6448,7 +6448,7 @@
           <p:cNvPr id="20" name="">
             <a:extLst xmlns:a="http://schemas.openxmlformats.org/drawingml/2006/main">
               <a:ext uri="{FF2B5EF4-FFF2-40B4-BE49-F238E27FC236}">
-                <a16:creationId xmlns:a16="http://schemas.microsoft.com/office/drawing/2014/main" id="{834E5B03-9B69-4AFF-8EFE-666877C99447}"/>
+                <a16:creationId xmlns:a16="http://schemas.microsoft.com/office/drawing/2014/main" id="{3D14FD3C-6EBB-4594-9FB5-1AD3FA6BE1D1}"/>
               </a:ext>
             </a:extLst>
           </p:cNvPr>
@@ -6505,7 +6505,7 @@
           <p:cNvPr id="21" name="">
             <a:extLst xmlns:a="http://schemas.openxmlformats.org/drawingml/2006/main">
               <a:ext uri="{FF2B5EF4-FFF2-40B4-BE49-F238E27FC236}">
-                <a16:creationId xmlns:a16="http://schemas.microsoft.com/office/drawing/2014/main" id="{3D9B9F37-5137-41D8-BE8F-96140CAC1383}"/>
+                <a16:creationId xmlns:a16="http://schemas.microsoft.com/office/drawing/2014/main" id="{EA4EF8B4-B51C-4F4D-A5E4-33EDA25DBC17}"/>
               </a:ext>
             </a:extLst>
           </p:cNvPr>
@@ -6562,7 +6562,7 @@
           <p:cNvPr id="22" name="">
             <a:extLst xmlns:a="http://schemas.openxmlformats.org/drawingml/2006/main">
               <a:ext uri="{FF2B5EF4-FFF2-40B4-BE49-F238E27FC236}">
-                <a16:creationId xmlns:a16="http://schemas.microsoft.com/office/drawing/2014/main" id="{13E2EDB1-63B3-4AA1-8BEA-12D5056D1FA1}"/>
+                <a16:creationId xmlns:a16="http://schemas.microsoft.com/office/drawing/2014/main" id="{37F11943-E749-4208-9E70-0108459EDBB6}"/>
               </a:ext>
             </a:extLst>
           </p:cNvPr>
@@ -6617,7 +6617,7 @@
     </p:spTree>
     <p:extLst>
       <p:ext uri="{BB962C8B-B14F-4D97-AF65-F5344CB8AC3E}">
-        <p14:creationId xmlns:p14="http://schemas.microsoft.com/office/powerpoint/2010/main" val="663488228"/>
+        <p14:creationId xmlns:p14="http://schemas.microsoft.com/office/powerpoint/2010/main" val="1670113898"/>
       </p:ext>
     </p:extLst>
   </p:cSld>
@@ -6818,7 +6818,7 @@
           <p:cNvPr id="16" name="">
             <a:extLst xmlns:a="http://schemas.openxmlformats.org/drawingml/2006/main">
               <a:ext uri="{FF2B5EF4-FFF2-40B4-BE49-F238E27FC236}">
-                <a16:creationId xmlns:a16="http://schemas.microsoft.com/office/drawing/2014/main" id="{92695D76-9ABD-40F2-B599-E001AA526D58}"/>
+                <a16:creationId xmlns:a16="http://schemas.microsoft.com/office/drawing/2014/main" id="{842029AF-4D04-48CF-8CDB-4500785AC815}"/>
               </a:ext>
             </a:extLst>
           </p:cNvPr>
@@ -6850,7 +6850,7 @@
           <p:cNvPr id="2" name="">
             <a:extLst xmlns:a="http://schemas.openxmlformats.org/drawingml/2006/main">
               <a:ext uri="{FF2B5EF4-FFF2-40B4-BE49-F238E27FC236}">
-                <a16:creationId xmlns:a16="http://schemas.microsoft.com/office/drawing/2014/main" id="{433E50D1-54E1-4ACA-8E7A-8503E5E2512B}"/>
+                <a16:creationId xmlns:a16="http://schemas.microsoft.com/office/drawing/2014/main" id="{4E95EC75-4D64-4F4C-9B38-727A40950576}"/>
               </a:ext>
             </a:extLst>
           </p:cNvPr>
@@ -6907,7 +6907,7 @@
           <p:cNvPr id="3" name="">
             <a:extLst xmlns:a="http://schemas.openxmlformats.org/drawingml/2006/main">
               <a:ext uri="{FF2B5EF4-FFF2-40B4-BE49-F238E27FC236}">
-                <a16:creationId xmlns:a16="http://schemas.microsoft.com/office/drawing/2014/main" id="{701C27A1-1323-4884-B7C1-31C5A89540D6}"/>
+                <a16:creationId xmlns:a16="http://schemas.microsoft.com/office/drawing/2014/main" id="{6A25805E-7820-42EF-9D13-DA914A802C52}"/>
               </a:ext>
             </a:extLst>
           </p:cNvPr>
@@ -6939,7 +6939,7 @@
           <p:cNvPr id="4" name="">
             <a:extLst xmlns:a="http://schemas.openxmlformats.org/drawingml/2006/main">
               <a:ext uri="{FF2B5EF4-FFF2-40B4-BE49-F238E27FC236}">
-                <a16:creationId xmlns:a16="http://schemas.microsoft.com/office/drawing/2014/main" id="{E24A0B1B-FAE4-42A9-9186-DA1891D48C0A}"/>
+                <a16:creationId xmlns:a16="http://schemas.microsoft.com/office/drawing/2014/main" id="{1F71A5B4-E938-4FF2-847F-4D08150F906A}"/>
               </a:ext>
             </a:extLst>
           </p:cNvPr>
@@ -6996,7 +6996,7 @@
           <p:cNvPr id="5" name="">
             <a:extLst xmlns:a="http://schemas.openxmlformats.org/drawingml/2006/main">
               <a:ext uri="{FF2B5EF4-FFF2-40B4-BE49-F238E27FC236}">
-                <a16:creationId xmlns:a16="http://schemas.microsoft.com/office/drawing/2014/main" id="{0DB19627-493B-4051-A2A7-3DC2B93040A1}"/>
+                <a16:creationId xmlns:a16="http://schemas.microsoft.com/office/drawing/2014/main" id="{71DC65F2-60EC-4DAA-A48C-AC59F5B7E7E5}"/>
               </a:ext>
             </a:extLst>
           </p:cNvPr>
@@ -7053,7 +7053,7 @@
           <p:cNvPr id="6" name="">
             <a:extLst xmlns:a="http://schemas.openxmlformats.org/drawingml/2006/main">
               <a:ext uri="{FF2B5EF4-FFF2-40B4-BE49-F238E27FC236}">
-                <a16:creationId xmlns:a16="http://schemas.microsoft.com/office/drawing/2014/main" id="{D7DCEA43-99F0-4D75-8945-666CDAFB787E}"/>
+                <a16:creationId xmlns:a16="http://schemas.microsoft.com/office/drawing/2014/main" id="{7898AE56-B997-467C-9532-B8297F6100DB}"/>
               </a:ext>
             </a:extLst>
           </p:cNvPr>
@@ -7110,7 +7110,7 @@
           <p:cNvPr id="7" name="">
             <a:extLst xmlns:a="http://schemas.openxmlformats.org/drawingml/2006/main">
               <a:ext uri="{FF2B5EF4-FFF2-40B4-BE49-F238E27FC236}">
-                <a16:creationId xmlns:a16="http://schemas.microsoft.com/office/drawing/2014/main" id="{971C086C-AD95-45E4-B6C0-366977F7446C}"/>
+                <a16:creationId xmlns:a16="http://schemas.microsoft.com/office/drawing/2014/main" id="{D3DBDF72-1F30-47CB-9409-C9E1E8C7368B}"/>
               </a:ext>
             </a:extLst>
           </p:cNvPr>
@@ -7142,7 +7142,7 @@
           <p:cNvPr id="8" name="">
             <a:extLst xmlns:a="http://schemas.openxmlformats.org/drawingml/2006/main">
               <a:ext uri="{FF2B5EF4-FFF2-40B4-BE49-F238E27FC236}">
-                <a16:creationId xmlns:a16="http://schemas.microsoft.com/office/drawing/2014/main" id="{7B14F313-AD7E-4820-B096-F0264939A20A}"/>
+                <a16:creationId xmlns:a16="http://schemas.microsoft.com/office/drawing/2014/main" id="{C764FEE3-5AFF-4F33-A050-408C71EA715A}"/>
               </a:ext>
             </a:extLst>
           </p:cNvPr>
@@ -7199,7 +7199,7 @@
           <p:cNvPr id="9" name="">
             <a:extLst xmlns:a="http://schemas.openxmlformats.org/drawingml/2006/main">
               <a:ext uri="{FF2B5EF4-FFF2-40B4-BE49-F238E27FC236}">
-                <a16:creationId xmlns:a16="http://schemas.microsoft.com/office/drawing/2014/main" id="{1D8AC7A3-A481-47DB-96EB-8AE8517CA632}"/>
+                <a16:creationId xmlns:a16="http://schemas.microsoft.com/office/drawing/2014/main" id="{36B74966-55E1-4150-AD9C-6C07ED6C4489}"/>
               </a:ext>
             </a:extLst>
           </p:cNvPr>
@@ -7256,7 +7256,7 @@
           <p:cNvPr id="10" name="">
             <a:extLst xmlns:a="http://schemas.openxmlformats.org/drawingml/2006/main">
               <a:ext uri="{FF2B5EF4-FFF2-40B4-BE49-F238E27FC236}">
-                <a16:creationId xmlns:a16="http://schemas.microsoft.com/office/drawing/2014/main" id="{753A3E86-7165-40C1-B6A9-EA55B8530579}"/>
+                <a16:creationId xmlns:a16="http://schemas.microsoft.com/office/drawing/2014/main" id="{2CADF6B0-F5F9-4DD3-9475-F2A61067FF39}"/>
               </a:ext>
             </a:extLst>
           </p:cNvPr>
@@ -7313,7 +7313,7 @@
           <p:cNvPr id="11" name="">
             <a:extLst xmlns:a="http://schemas.openxmlformats.org/drawingml/2006/main">
               <a:ext uri="{FF2B5EF4-FFF2-40B4-BE49-F238E27FC236}">
-                <a16:creationId xmlns:a16="http://schemas.microsoft.com/office/drawing/2014/main" id="{1B761730-EF2A-4AF2-B5C7-D01C4B2023B2}"/>
+                <a16:creationId xmlns:a16="http://schemas.microsoft.com/office/drawing/2014/main" id="{3AA70064-8243-466B-ACF7-A3D371C7B7CC}"/>
               </a:ext>
             </a:extLst>
           </p:cNvPr>
@@ -7345,7 +7345,7 @@
           <p:cNvPr id="12" name="">
             <a:extLst xmlns:a="http://schemas.openxmlformats.org/drawingml/2006/main">
               <a:ext uri="{FF2B5EF4-FFF2-40B4-BE49-F238E27FC236}">
-                <a16:creationId xmlns:a16="http://schemas.microsoft.com/office/drawing/2014/main" id="{3483763E-3DBB-4471-88C9-EDC34664A638}"/>
+                <a16:creationId xmlns:a16="http://schemas.microsoft.com/office/drawing/2014/main" id="{FF7840E4-B429-427A-8FA6-266FA8D4CEE0}"/>
               </a:ext>
             </a:extLst>
           </p:cNvPr>
@@ -7402,7 +7402,7 @@
           <p:cNvPr id="13" name="">
             <a:extLst xmlns:a="http://schemas.openxmlformats.org/drawingml/2006/main">
               <a:ext uri="{FF2B5EF4-FFF2-40B4-BE49-F238E27FC236}">
-                <a16:creationId xmlns:a16="http://schemas.microsoft.com/office/drawing/2014/main" id="{899D62A7-A5DE-4A17-91F2-07246A6D0CF0}"/>
+                <a16:creationId xmlns:a16="http://schemas.microsoft.com/office/drawing/2014/main" id="{01C61F57-0467-4149-B948-0502CB6D761C}"/>
               </a:ext>
             </a:extLst>
           </p:cNvPr>
@@ -7459,7 +7459,7 @@
           <p:cNvPr id="14" name="">
             <a:extLst xmlns:a="http://schemas.openxmlformats.org/drawingml/2006/main">
               <a:ext uri="{FF2B5EF4-FFF2-40B4-BE49-F238E27FC236}">
-                <a16:creationId xmlns:a16="http://schemas.microsoft.com/office/drawing/2014/main" id="{E0E4FC2A-D913-4A15-B9F3-0C9CA2104757}"/>
+                <a16:creationId xmlns:a16="http://schemas.microsoft.com/office/drawing/2014/main" id="{A899A278-F6AD-4619-876D-D1307AE58121}"/>
               </a:ext>
             </a:extLst>
           </p:cNvPr>
@@ -7516,7 +7516,7 @@
           <p:cNvPr id="15" name="">
             <a:extLst xmlns:a="http://schemas.openxmlformats.org/drawingml/2006/main">
               <a:ext uri="{FF2B5EF4-FFF2-40B4-BE49-F238E27FC236}">
-                <a16:creationId xmlns:a16="http://schemas.microsoft.com/office/drawing/2014/main" id="{1F06BE86-283C-4993-B43F-0EAC2DB06A00}"/>
+                <a16:creationId xmlns:a16="http://schemas.microsoft.com/office/drawing/2014/main" id="{3E6D3437-E906-4E80-A793-12CB89EA99E0}"/>
               </a:ext>
             </a:extLst>
           </p:cNvPr>
@@ -7571,7 +7571,7 @@
     </p:spTree>
     <p:extLst>
       <p:ext uri="{BB962C8B-B14F-4D97-AF65-F5344CB8AC3E}">
-        <p14:creationId xmlns:p14="http://schemas.microsoft.com/office/powerpoint/2010/main" val="45441999"/>
+        <p14:creationId xmlns:p14="http://schemas.microsoft.com/office/powerpoint/2010/main" val="1154793009"/>
       </p:ext>
     </p:extLst>
   </p:cSld>
@@ -7772,7 +7772,7 @@
           <p:cNvPr id="23" name="">
             <a:extLst xmlns:a="http://schemas.openxmlformats.org/drawingml/2006/main">
               <a:ext uri="{FF2B5EF4-FFF2-40B4-BE49-F238E27FC236}">
-                <a16:creationId xmlns:a16="http://schemas.microsoft.com/office/drawing/2014/main" id="{7912D998-5195-4EB0-A46E-850C1B2F3C9E}"/>
+                <a16:creationId xmlns:a16="http://schemas.microsoft.com/office/drawing/2014/main" id="{9F0E6FEF-9B5D-4295-B5B8-30C8E0931EF2}"/>
               </a:ext>
             </a:extLst>
           </p:cNvPr>
@@ -7804,7 +7804,7 @@
           <p:cNvPr id="2" name="">
             <a:extLst xmlns:a="http://schemas.openxmlformats.org/drawingml/2006/main">
               <a:ext uri="{FF2B5EF4-FFF2-40B4-BE49-F238E27FC236}">
-                <a16:creationId xmlns:a16="http://schemas.microsoft.com/office/drawing/2014/main" id="{F53B03A9-CE29-4C74-89A2-CA45E43527D9}"/>
+                <a16:creationId xmlns:a16="http://schemas.microsoft.com/office/drawing/2014/main" id="{D844058A-2DF1-4182-8586-796F49BD7A95}"/>
               </a:ext>
             </a:extLst>
           </p:cNvPr>
@@ -7861,7 +7861,7 @@
           <p:cNvPr id="3" name="">
             <a:extLst xmlns:a="http://schemas.openxmlformats.org/drawingml/2006/main">
               <a:ext uri="{FF2B5EF4-FFF2-40B4-BE49-F238E27FC236}">
-                <a16:creationId xmlns:a16="http://schemas.microsoft.com/office/drawing/2014/main" id="{AD5B931D-2962-4F65-B24C-DFF9E24E9055}"/>
+                <a16:creationId xmlns:a16="http://schemas.microsoft.com/office/drawing/2014/main" id="{3A5FFA29-7562-4736-A86A-B26E6B0EA0F6}"/>
               </a:ext>
             </a:extLst>
           </p:cNvPr>
@@ -7893,7 +7893,7 @@
           <p:cNvPr id="4" name="">
             <a:extLst xmlns:a="http://schemas.openxmlformats.org/drawingml/2006/main">
               <a:ext uri="{FF2B5EF4-FFF2-40B4-BE49-F238E27FC236}">
-                <a16:creationId xmlns:a16="http://schemas.microsoft.com/office/drawing/2014/main" id="{E90C13AC-AD16-4F40-9504-6E7F6F7AAED7}"/>
+                <a16:creationId xmlns:a16="http://schemas.microsoft.com/office/drawing/2014/main" id="{24CE0DCE-3631-4CBF-ADCF-1A90D8809EB1}"/>
               </a:ext>
             </a:extLst>
           </p:cNvPr>
@@ -7950,7 +7950,7 @@
           <p:cNvPr id="5" name="">
             <a:extLst xmlns:a="http://schemas.openxmlformats.org/drawingml/2006/main">
               <a:ext uri="{FF2B5EF4-FFF2-40B4-BE49-F238E27FC236}">
-                <a16:creationId xmlns:a16="http://schemas.microsoft.com/office/drawing/2014/main" id="{2AAF8869-AE1C-4932-813A-AC978C27082C}"/>
+                <a16:creationId xmlns:a16="http://schemas.microsoft.com/office/drawing/2014/main" id="{4A3D49DA-961B-4990-9729-75F49F7D4DC5}"/>
               </a:ext>
             </a:extLst>
           </p:cNvPr>
@@ -8007,7 +8007,7 @@
           <p:cNvPr id="6" name="">
             <a:extLst xmlns:a="http://schemas.openxmlformats.org/drawingml/2006/main">
               <a:ext uri="{FF2B5EF4-FFF2-40B4-BE49-F238E27FC236}">
-                <a16:creationId xmlns:a16="http://schemas.microsoft.com/office/drawing/2014/main" id="{EA545A7D-61EC-479E-BAB2-6F3DF74A5C49}"/>
+                <a16:creationId xmlns:a16="http://schemas.microsoft.com/office/drawing/2014/main" id="{FDDDABE6-632C-492E-A337-427D82E28808}"/>
               </a:ext>
             </a:extLst>
           </p:cNvPr>
@@ -8064,7 +8064,7 @@
           <p:cNvPr id="7" name="">
             <a:extLst xmlns:a="http://schemas.openxmlformats.org/drawingml/2006/main">
               <a:ext uri="{FF2B5EF4-FFF2-40B4-BE49-F238E27FC236}">
-                <a16:creationId xmlns:a16="http://schemas.microsoft.com/office/drawing/2014/main" id="{E6C152A5-DCD7-41F9-BEA8-9AF6B701D82F}"/>
+                <a16:creationId xmlns:a16="http://schemas.microsoft.com/office/drawing/2014/main" id="{06FCB025-DFC3-4C87-BB9E-AE646F990D6A}"/>
               </a:ext>
             </a:extLst>
           </p:cNvPr>
@@ -8096,7 +8096,7 @@
           <p:cNvPr id="8" name="">
             <a:extLst xmlns:a="http://schemas.openxmlformats.org/drawingml/2006/main">
               <a:ext uri="{FF2B5EF4-FFF2-40B4-BE49-F238E27FC236}">
-                <a16:creationId xmlns:a16="http://schemas.microsoft.com/office/drawing/2014/main" id="{7E69E39E-E025-4214-B4B4-0CADE486CDDC}"/>
+                <a16:creationId xmlns:a16="http://schemas.microsoft.com/office/drawing/2014/main" id="{02BDF2F7-FBDD-4971-9953-CF247727FA85}"/>
               </a:ext>
             </a:extLst>
           </p:cNvPr>
@@ -8153,7 +8153,7 @@
           <p:cNvPr id="9" name="">
             <a:extLst xmlns:a="http://schemas.openxmlformats.org/drawingml/2006/main">
               <a:ext uri="{FF2B5EF4-FFF2-40B4-BE49-F238E27FC236}">
-                <a16:creationId xmlns:a16="http://schemas.microsoft.com/office/drawing/2014/main" id="{1EDBC1B1-12C3-4ACE-8409-7F168B9A9173}"/>
+                <a16:creationId xmlns:a16="http://schemas.microsoft.com/office/drawing/2014/main" id="{95209711-7B33-4AEB-A80D-8FC1AE7E4D0D}"/>
               </a:ext>
             </a:extLst>
           </p:cNvPr>
@@ -8210,19 +8210,19 @@
           <p:cNvPr id="10" name="">
             <a:extLst xmlns:a="http://schemas.openxmlformats.org/drawingml/2006/main">
               <a:ext uri="{FF2B5EF4-FFF2-40B4-BE49-F238E27FC236}">
-                <a16:creationId xmlns:a16="http://schemas.microsoft.com/office/drawing/2014/main" id="{AF6E6337-1E5D-407D-83CF-A2C178EE7CAA}"/>
-              </a:ext>
-            </a:extLst>
-          </p:cNvPr>
-          <p:cNvSpPr>
-            <a:spLocks xmlns:a="http://schemas.openxmlformats.org/drawingml/2006/main" noGrp="1"/>
-          </p:cNvSpPr>
-          <p:nvPr/>
-        </p:nvSpPr>
-        <p:spPr>
-          <a:xfrm xmlns:a="http://schemas.openxmlformats.org/drawingml/2006/main">
-            <a:off x="914400" y="1257300"/>
-            <a:ext cx="10363200" cy="781050"/>
+                <a16:creationId xmlns:a16="http://schemas.microsoft.com/office/drawing/2014/main" id="{8DB3936B-EC03-470D-A452-7792CF15A103}"/>
+              </a:ext>
+            </a:extLst>
+          </p:cNvPr>
+          <p:cNvSpPr>
+            <a:spLocks xmlns:a="http://schemas.openxmlformats.org/drawingml/2006/main" noGrp="1"/>
+          </p:cNvSpPr>
+          <p:nvPr/>
+        </p:nvSpPr>
+        <p:spPr>
+          <a:xfrm xmlns:a="http://schemas.openxmlformats.org/drawingml/2006/main">
+            <a:off x="857250" y="1219200"/>
+            <a:ext cx="10477500" cy="742950"/>
           </a:xfrm>
           <a:prstGeom xmlns:a="http://schemas.openxmlformats.org/drawingml/2006/main" prst="rect">
             <a:avLst/>
@@ -8239,7 +8239,7 @@
           <a:lstStyle xmlns:a="http://schemas.openxmlformats.org/drawingml/2006/main"/>
           <a:p xmlns:a="http://schemas.openxmlformats.org/drawingml/2006/main">
             <a:pPr algn="ctr">
-              <a:defRPr sz="2175" b="1">
+              <a:defRPr sz="2100" b="1">
                 <a:solidFill>
                   <a:srgbClr val="17253A"/>
                 </a:solidFill>
@@ -8249,7 +8249,7 @@
               </a:defRPr>
             </a:pPr>
             <a:r>
-              <a:rPr sz="2175" b="1">
+              <a:rPr sz="2100" b="1">
                 <a:solidFill>
                   <a:srgbClr val="17253A"/>
                 </a:solidFill>
@@ -8267,28 +8267,30 @@
           <p:cNvPr id="11" name="">
             <a:extLst xmlns:a="http://schemas.openxmlformats.org/drawingml/2006/main">
               <a:ext uri="{FF2B5EF4-FFF2-40B4-BE49-F238E27FC236}">
-                <a16:creationId xmlns:a16="http://schemas.microsoft.com/office/drawing/2014/main" id="{31A7F5E2-B6A4-4121-ABD5-6AE9E34ECAA5}"/>
-              </a:ext>
-            </a:extLst>
-          </p:cNvPr>
-          <p:cNvSpPr>
-            <a:spLocks xmlns:a="http://schemas.openxmlformats.org/drawingml/2006/main" noGrp="1"/>
-          </p:cNvSpPr>
-          <p:nvPr/>
-        </p:nvSpPr>
-        <p:spPr>
-          <a:xfrm xmlns:a="http://schemas.openxmlformats.org/drawingml/2006/main">
-            <a:off x="1000125" y="2247900"/>
-            <a:ext cx="476250" cy="476250"/>
-          </a:xfrm>
-          <a:prstGeom xmlns:a="http://schemas.openxmlformats.org/drawingml/2006/main" prst="ellipse">
+                <a16:creationId xmlns:a16="http://schemas.microsoft.com/office/drawing/2014/main" id="{99297280-15F4-4447-BC31-424FF497DDD7}"/>
+              </a:ext>
+            </a:extLst>
+          </p:cNvPr>
+          <p:cNvSpPr>
+            <a:spLocks xmlns:a="http://schemas.openxmlformats.org/drawingml/2006/main" noGrp="1"/>
+          </p:cNvSpPr>
+          <p:nvPr/>
+        </p:nvSpPr>
+        <p:spPr>
+          <a:xfrm xmlns:a="http://schemas.openxmlformats.org/drawingml/2006/main">
+            <a:off x="971550" y="2124075"/>
+            <a:ext cx="38100" cy="3524250"/>
+          </a:xfrm>
+          <a:prstGeom xmlns:a="http://schemas.openxmlformats.org/drawingml/2006/main" prst="rect">
             <a:avLst/>
           </a:prstGeom>
           <a:solidFill xmlns:a="http://schemas.openxmlformats.org/drawingml/2006/main">
-            <a:srgbClr val="18324A"/>
+            <a:srgbClr val="2C6E73"/>
           </a:solidFill>
           <a:ln xmlns:a="http://schemas.openxmlformats.org/drawingml/2006/main" w="0">
-            <a:noFill/>
+            <a:solidFill>
+              <a:srgbClr val="2C6E73"/>
+            </a:solidFill>
           </a:ln>
         </p:spPr>
       </p:sp>
@@ -8297,19 +8299,19 @@
           <p:cNvPr id="12" name="">
             <a:extLst xmlns:a="http://schemas.openxmlformats.org/drawingml/2006/main">
               <a:ext uri="{FF2B5EF4-FFF2-40B4-BE49-F238E27FC236}">
-                <a16:creationId xmlns:a16="http://schemas.microsoft.com/office/drawing/2014/main" id="{816C584E-6174-417B-936E-99625A5F317A}"/>
-              </a:ext>
-            </a:extLst>
-          </p:cNvPr>
-          <p:cNvSpPr>
-            <a:spLocks xmlns:a="http://schemas.openxmlformats.org/drawingml/2006/main" noGrp="1"/>
-          </p:cNvSpPr>
-          <p:nvPr/>
-        </p:nvSpPr>
-        <p:spPr>
-          <a:xfrm xmlns:a="http://schemas.openxmlformats.org/drawingml/2006/main">
-            <a:off x="1000125" y="2276475"/>
-            <a:ext cx="476250" cy="419100"/>
+                <a16:creationId xmlns:a16="http://schemas.microsoft.com/office/drawing/2014/main" id="{27C008EB-7794-462A-99C4-7B66DC58FDC5}"/>
+              </a:ext>
+            </a:extLst>
+          </p:cNvPr>
+          <p:cNvSpPr>
+            <a:spLocks xmlns:a="http://schemas.openxmlformats.org/drawingml/2006/main" noGrp="1"/>
+          </p:cNvSpPr>
+          <p:nvPr/>
+        </p:nvSpPr>
+        <p:spPr>
+          <a:xfrm xmlns:a="http://schemas.openxmlformats.org/drawingml/2006/main">
+            <a:off x="1162050" y="2200275"/>
+            <a:ext cx="400050" cy="400050"/>
           </a:xfrm>
           <a:prstGeom xmlns:a="http://schemas.openxmlformats.org/drawingml/2006/main" prst="rect">
             <a:avLst/>
@@ -8326,9 +8328,9 @@
           <a:lstStyle xmlns:a="http://schemas.openxmlformats.org/drawingml/2006/main"/>
           <a:p xmlns:a="http://schemas.openxmlformats.org/drawingml/2006/main">
             <a:pPr algn="ctr">
-              <a:defRPr sz="1350" b="1">
-                <a:solidFill>
-                  <a:srgbClr val="FFFFFF"/>
+              <a:defRPr sz="1125" b="1">
+                <a:solidFill>
+                  <a:srgbClr val="2C6E73"/>
                 </a:solidFill>
                 <a:latin typeface="Arial"/>
                 <a:ea typeface="Arial"/>
@@ -8336,9 +8338,9 @@
               </a:defRPr>
             </a:pPr>
             <a:r>
-              <a:rPr sz="1350" b="1">
-                <a:solidFill>
-                  <a:srgbClr val="FFFFFF"/>
+              <a:rPr sz="1125" b="1">
+                <a:solidFill>
+                  <a:srgbClr val="2C6E73"/>
                 </a:solidFill>
                 <a:latin typeface="Arial"/>
                 <a:ea typeface="Arial"/>
@@ -8354,19 +8356,19 @@
           <p:cNvPr id="13" name="">
             <a:extLst xmlns:a="http://schemas.openxmlformats.org/drawingml/2006/main">
               <a:ext uri="{FF2B5EF4-FFF2-40B4-BE49-F238E27FC236}">
-                <a16:creationId xmlns:a16="http://schemas.microsoft.com/office/drawing/2014/main" id="{120D949B-B15B-4ECB-B7B4-CEE7E51C322F}"/>
-              </a:ext>
-            </a:extLst>
-          </p:cNvPr>
-          <p:cNvSpPr>
-            <a:spLocks xmlns:a="http://schemas.openxmlformats.org/drawingml/2006/main" noGrp="1"/>
-          </p:cNvSpPr>
-          <p:nvPr/>
-        </p:nvSpPr>
-        <p:spPr>
-          <a:xfrm xmlns:a="http://schemas.openxmlformats.org/drawingml/2006/main">
-            <a:off x="1714500" y="2181225"/>
-            <a:ext cx="9429750" cy="609600"/>
+                <a16:creationId xmlns:a16="http://schemas.microsoft.com/office/drawing/2014/main" id="{C1D8D1D5-01C2-4D15-858D-128892A33E92}"/>
+              </a:ext>
+            </a:extLst>
+          </p:cNvPr>
+          <p:cNvSpPr>
+            <a:spLocks xmlns:a="http://schemas.openxmlformats.org/drawingml/2006/main" noGrp="1"/>
+          </p:cNvSpPr>
+          <p:nvPr/>
+        </p:nvSpPr>
+        <p:spPr>
+          <a:xfrm xmlns:a="http://schemas.openxmlformats.org/drawingml/2006/main">
+            <a:off x="1714500" y="2114550"/>
+            <a:ext cx="9525000" cy="809625"/>
           </a:xfrm>
           <a:prstGeom xmlns:a="http://schemas.openxmlformats.org/drawingml/2006/main" prst="rect">
             <a:avLst/>
@@ -8383,7 +8385,7 @@
           <a:lstStyle xmlns:a="http://schemas.openxmlformats.org/drawingml/2006/main"/>
           <a:p xmlns:a="http://schemas.openxmlformats.org/drawingml/2006/main">
             <a:pPr algn="l">
-              <a:defRPr sz="1500" b="0">
+              <a:defRPr sz="1725" b="0">
                 <a:solidFill>
                   <a:srgbClr val="17253A"/>
                 </a:solidFill>
@@ -8393,7 +8395,7 @@
               </a:defRPr>
             </a:pPr>
             <a:r>
-              <a:rPr sz="1500" b="0">
+              <a:rPr sz="1725" b="0">
                 <a:solidFill>
                   <a:srgbClr val="17253A"/>
                 </a:solidFill>
@@ -8401,7 +8403,7 @@
                 <a:ea typeface="Arial"/>
                 <a:cs typeface="Arial"/>
               </a:rPr>
-              <a:t>Identify the structure: Underline the place named in the question.</a:t>
+              <a:t>384,650 to nearest 10,000: 4,650 &lt; 5,000</a:t>
             </a:r>
           </a:p>
         </p:txBody>
@@ -8411,28 +8413,30 @@
           <p:cNvPr id="14" name="">
             <a:extLst xmlns:a="http://schemas.openxmlformats.org/drawingml/2006/main">
               <a:ext uri="{FF2B5EF4-FFF2-40B4-BE49-F238E27FC236}">
-                <a16:creationId xmlns:a16="http://schemas.microsoft.com/office/drawing/2014/main" id="{ECEE45EE-6C5C-49E5-919B-0DFA6D32998D}"/>
-              </a:ext>
-            </a:extLst>
-          </p:cNvPr>
-          <p:cNvSpPr>
-            <a:spLocks xmlns:a="http://schemas.openxmlformats.org/drawingml/2006/main" noGrp="1"/>
-          </p:cNvSpPr>
-          <p:nvPr/>
-        </p:nvSpPr>
-        <p:spPr>
-          <a:xfrm xmlns:a="http://schemas.openxmlformats.org/drawingml/2006/main">
-            <a:off x="1000125" y="2990850"/>
-            <a:ext cx="476250" cy="476250"/>
-          </a:xfrm>
-          <a:prstGeom xmlns:a="http://schemas.openxmlformats.org/drawingml/2006/main" prst="ellipse">
+                <a16:creationId xmlns:a16="http://schemas.microsoft.com/office/drawing/2014/main" id="{A2E2F2FA-7318-4C07-9170-746F508A31E0}"/>
+              </a:ext>
+            </a:extLst>
+          </p:cNvPr>
+          <p:cNvSpPr>
+            <a:spLocks xmlns:a="http://schemas.openxmlformats.org/drawingml/2006/main" noGrp="1"/>
+          </p:cNvSpPr>
+          <p:nvPr/>
+        </p:nvSpPr>
+        <p:spPr>
+          <a:xfrm xmlns:a="http://schemas.openxmlformats.org/drawingml/2006/main">
+            <a:off x="1714500" y="2943225"/>
+            <a:ext cx="9334500" cy="9525"/>
+          </a:xfrm>
+          <a:prstGeom xmlns:a="http://schemas.openxmlformats.org/drawingml/2006/main" prst="rect">
             <a:avLst/>
           </a:prstGeom>
           <a:solidFill xmlns:a="http://schemas.openxmlformats.org/drawingml/2006/main">
-            <a:srgbClr val="2C6E73"/>
+            <a:srgbClr val="D9E0E6"/>
           </a:solidFill>
           <a:ln xmlns:a="http://schemas.openxmlformats.org/drawingml/2006/main" w="0">
-            <a:noFill/>
+            <a:solidFill>
+              <a:srgbClr val="D9E0E6"/>
+            </a:solidFill>
           </a:ln>
         </p:spPr>
       </p:sp>
@@ -8441,19 +8445,19 @@
           <p:cNvPr id="15" name="">
             <a:extLst xmlns:a="http://schemas.openxmlformats.org/drawingml/2006/main">
               <a:ext uri="{FF2B5EF4-FFF2-40B4-BE49-F238E27FC236}">
-                <a16:creationId xmlns:a16="http://schemas.microsoft.com/office/drawing/2014/main" id="{13F1A08D-E9F9-4A59-A355-499D6DFD9EF0}"/>
-              </a:ext>
-            </a:extLst>
-          </p:cNvPr>
-          <p:cNvSpPr>
-            <a:spLocks xmlns:a="http://schemas.openxmlformats.org/drawingml/2006/main" noGrp="1"/>
-          </p:cNvSpPr>
-          <p:nvPr/>
-        </p:nvSpPr>
-        <p:spPr>
-          <a:xfrm xmlns:a="http://schemas.openxmlformats.org/drawingml/2006/main">
-            <a:off x="1000125" y="3019425"/>
-            <a:ext cx="476250" cy="419100"/>
+                <a16:creationId xmlns:a16="http://schemas.microsoft.com/office/drawing/2014/main" id="{2A08143A-C6EC-456A-A4C7-DCD441737D7D}"/>
+              </a:ext>
+            </a:extLst>
+          </p:cNvPr>
+          <p:cNvSpPr>
+            <a:spLocks xmlns:a="http://schemas.openxmlformats.org/drawingml/2006/main" noGrp="1"/>
+          </p:cNvSpPr>
+          <p:nvPr/>
+        </p:nvSpPr>
+        <p:spPr>
+          <a:xfrm xmlns:a="http://schemas.openxmlformats.org/drawingml/2006/main">
+            <a:off x="1162050" y="3076575"/>
+            <a:ext cx="400050" cy="400050"/>
           </a:xfrm>
           <a:prstGeom xmlns:a="http://schemas.openxmlformats.org/drawingml/2006/main" prst="rect">
             <a:avLst/>
@@ -8470,9 +8474,9 @@
           <a:lstStyle xmlns:a="http://schemas.openxmlformats.org/drawingml/2006/main"/>
           <a:p xmlns:a="http://schemas.openxmlformats.org/drawingml/2006/main">
             <a:pPr algn="ctr">
-              <a:defRPr sz="1350" b="1">
-                <a:solidFill>
-                  <a:srgbClr val="FFFFFF"/>
+              <a:defRPr sz="1125" b="1">
+                <a:solidFill>
+                  <a:srgbClr val="2C6E73"/>
                 </a:solidFill>
                 <a:latin typeface="Arial"/>
                 <a:ea typeface="Arial"/>
@@ -8480,9 +8484,9 @@
               </a:defRPr>
             </a:pPr>
             <a:r>
-              <a:rPr sz="1350" b="1">
-                <a:solidFill>
-                  <a:srgbClr val="FFFFFF"/>
+              <a:rPr sz="1125" b="1">
+                <a:solidFill>
+                  <a:srgbClr val="2C6E73"/>
                 </a:solidFill>
                 <a:latin typeface="Arial"/>
                 <a:ea typeface="Arial"/>
@@ -8498,19 +8502,19 @@
           <p:cNvPr id="16" name="">
             <a:extLst xmlns:a="http://schemas.openxmlformats.org/drawingml/2006/main">
               <a:ext uri="{FF2B5EF4-FFF2-40B4-BE49-F238E27FC236}">
-                <a16:creationId xmlns:a16="http://schemas.microsoft.com/office/drawing/2014/main" id="{5B646D9A-257E-41A7-B427-23DBAE25B645}"/>
-              </a:ext>
-            </a:extLst>
-          </p:cNvPr>
-          <p:cNvSpPr>
-            <a:spLocks xmlns:a="http://schemas.openxmlformats.org/drawingml/2006/main" noGrp="1"/>
-          </p:cNvSpPr>
-          <p:nvPr/>
-        </p:nvSpPr>
-        <p:spPr>
-          <a:xfrm xmlns:a="http://schemas.openxmlformats.org/drawingml/2006/main">
-            <a:off x="1714500" y="2924175"/>
-            <a:ext cx="9429750" cy="609600"/>
+                <a16:creationId xmlns:a16="http://schemas.microsoft.com/office/drawing/2014/main" id="{F372F83D-6DD4-4DED-80C3-D5AFA5419F3F}"/>
+              </a:ext>
+            </a:extLst>
+          </p:cNvPr>
+          <p:cNvSpPr>
+            <a:spLocks xmlns:a="http://schemas.openxmlformats.org/drawingml/2006/main" noGrp="1"/>
+          </p:cNvSpPr>
+          <p:nvPr/>
+        </p:nvSpPr>
+        <p:spPr>
+          <a:xfrm xmlns:a="http://schemas.openxmlformats.org/drawingml/2006/main">
+            <a:off x="1714500" y="2990850"/>
+            <a:ext cx="9525000" cy="809625"/>
           </a:xfrm>
           <a:prstGeom xmlns:a="http://schemas.openxmlformats.org/drawingml/2006/main" prst="rect">
             <a:avLst/>
@@ -8527,7 +8531,7 @@
           <a:lstStyle xmlns:a="http://schemas.openxmlformats.org/drawingml/2006/main"/>
           <a:p xmlns:a="http://schemas.openxmlformats.org/drawingml/2006/main">
             <a:pPr algn="l">
-              <a:defRPr sz="1500" b="0">
+              <a:defRPr sz="1725" b="0">
                 <a:solidFill>
                   <a:srgbClr val="17253A"/>
                 </a:solidFill>
@@ -8537,7 +8541,7 @@
               </a:defRPr>
             </a:pPr>
             <a:r>
-              <a:rPr sz="1500" b="0">
+              <a:rPr sz="1725" b="0">
                 <a:solidFill>
                   <a:srgbClr val="17253A"/>
                 </a:solidFill>
@@ -8545,7 +8549,7 @@
                 <a:ea typeface="Arial"/>
                 <a:cs typeface="Arial"/>
               </a:rPr>
-              <a:t>Set up the method: Check the digit immediately to its right or locate the two boundaries.</a:t>
+              <a:t>384,650 → 380,000</a:t>
             </a:r>
           </a:p>
         </p:txBody>
@@ -8555,28 +8559,30 @@
           <p:cNvPr id="17" name="">
             <a:extLst xmlns:a="http://schemas.openxmlformats.org/drawingml/2006/main">
               <a:ext uri="{FF2B5EF4-FFF2-40B4-BE49-F238E27FC236}">
-                <a16:creationId xmlns:a16="http://schemas.microsoft.com/office/drawing/2014/main" id="{033495C3-FCAF-4C54-9F3F-80B5F4862C84}"/>
-              </a:ext>
-            </a:extLst>
-          </p:cNvPr>
-          <p:cNvSpPr>
-            <a:spLocks xmlns:a="http://schemas.openxmlformats.org/drawingml/2006/main" noGrp="1"/>
-          </p:cNvSpPr>
-          <p:nvPr/>
-        </p:nvSpPr>
-        <p:spPr>
-          <a:xfrm xmlns:a="http://schemas.openxmlformats.org/drawingml/2006/main">
-            <a:off x="1000125" y="3733800"/>
-            <a:ext cx="476250" cy="476250"/>
-          </a:xfrm>
-          <a:prstGeom xmlns:a="http://schemas.openxmlformats.org/drawingml/2006/main" prst="ellipse">
+                <a16:creationId xmlns:a16="http://schemas.microsoft.com/office/drawing/2014/main" id="{BDC78D71-C6D2-4E5C-828B-91EA4A8A721C}"/>
+              </a:ext>
+            </a:extLst>
+          </p:cNvPr>
+          <p:cNvSpPr>
+            <a:spLocks xmlns:a="http://schemas.openxmlformats.org/drawingml/2006/main" noGrp="1"/>
+          </p:cNvSpPr>
+          <p:nvPr/>
+        </p:nvSpPr>
+        <p:spPr>
+          <a:xfrm xmlns:a="http://schemas.openxmlformats.org/drawingml/2006/main">
+            <a:off x="1714500" y="3819525"/>
+            <a:ext cx="9334500" cy="9525"/>
+          </a:xfrm>
+          <a:prstGeom xmlns:a="http://schemas.openxmlformats.org/drawingml/2006/main" prst="rect">
             <a:avLst/>
           </a:prstGeom>
           <a:solidFill xmlns:a="http://schemas.openxmlformats.org/drawingml/2006/main">
-            <a:srgbClr val="2C6E73"/>
+            <a:srgbClr val="D9E0E6"/>
           </a:solidFill>
           <a:ln xmlns:a="http://schemas.openxmlformats.org/drawingml/2006/main" w="0">
-            <a:noFill/>
+            <a:solidFill>
+              <a:srgbClr val="D9E0E6"/>
+            </a:solidFill>
           </a:ln>
         </p:spPr>
       </p:sp>
@@ -8585,19 +8591,19 @@
           <p:cNvPr id="18" name="">
             <a:extLst xmlns:a="http://schemas.openxmlformats.org/drawingml/2006/main">
               <a:ext uri="{FF2B5EF4-FFF2-40B4-BE49-F238E27FC236}">
-                <a16:creationId xmlns:a16="http://schemas.microsoft.com/office/drawing/2014/main" id="{4B0E590C-5E43-4215-B12F-749DB506522C}"/>
-              </a:ext>
-            </a:extLst>
-          </p:cNvPr>
-          <p:cNvSpPr>
-            <a:spLocks xmlns:a="http://schemas.openxmlformats.org/drawingml/2006/main" noGrp="1"/>
-          </p:cNvSpPr>
-          <p:nvPr/>
-        </p:nvSpPr>
-        <p:spPr>
-          <a:xfrm xmlns:a="http://schemas.openxmlformats.org/drawingml/2006/main">
-            <a:off x="1000125" y="3762375"/>
-            <a:ext cx="476250" cy="419100"/>
+                <a16:creationId xmlns:a16="http://schemas.microsoft.com/office/drawing/2014/main" id="{E5162D77-B0CB-49E9-ABA1-03C55D09CA3B}"/>
+              </a:ext>
+            </a:extLst>
+          </p:cNvPr>
+          <p:cNvSpPr>
+            <a:spLocks xmlns:a="http://schemas.openxmlformats.org/drawingml/2006/main" noGrp="1"/>
+          </p:cNvSpPr>
+          <p:nvPr/>
+        </p:nvSpPr>
+        <p:spPr>
+          <a:xfrm xmlns:a="http://schemas.openxmlformats.org/drawingml/2006/main">
+            <a:off x="1162050" y="3952875"/>
+            <a:ext cx="400050" cy="400050"/>
           </a:xfrm>
           <a:prstGeom xmlns:a="http://schemas.openxmlformats.org/drawingml/2006/main" prst="rect">
             <a:avLst/>
@@ -8614,9 +8620,9 @@
           <a:lstStyle xmlns:a="http://schemas.openxmlformats.org/drawingml/2006/main"/>
           <a:p xmlns:a="http://schemas.openxmlformats.org/drawingml/2006/main">
             <a:pPr algn="ctr">
-              <a:defRPr sz="1350" b="1">
-                <a:solidFill>
-                  <a:srgbClr val="FFFFFF"/>
+              <a:defRPr sz="1125" b="1">
+                <a:solidFill>
+                  <a:srgbClr val="2C6E73"/>
                 </a:solidFill>
                 <a:latin typeface="Arial"/>
                 <a:ea typeface="Arial"/>
@@ -8624,9 +8630,9 @@
               </a:defRPr>
             </a:pPr>
             <a:r>
-              <a:rPr sz="1350" b="1">
-                <a:solidFill>
-                  <a:srgbClr val="FFFFFF"/>
+              <a:rPr sz="1125" b="1">
+                <a:solidFill>
+                  <a:srgbClr val="2C6E73"/>
                 </a:solidFill>
                 <a:latin typeface="Arial"/>
                 <a:ea typeface="Arial"/>
@@ -8642,19 +8648,19 @@
           <p:cNvPr id="19" name="">
             <a:extLst xmlns:a="http://schemas.openxmlformats.org/drawingml/2006/main">
               <a:ext uri="{FF2B5EF4-FFF2-40B4-BE49-F238E27FC236}">
-                <a16:creationId xmlns:a16="http://schemas.microsoft.com/office/drawing/2014/main" id="{11CDA027-B80D-4348-B474-38015BC4900B}"/>
-              </a:ext>
-            </a:extLst>
-          </p:cNvPr>
-          <p:cNvSpPr>
-            <a:spLocks xmlns:a="http://schemas.openxmlformats.org/drawingml/2006/main" noGrp="1"/>
-          </p:cNvSpPr>
-          <p:nvPr/>
-        </p:nvSpPr>
-        <p:spPr>
-          <a:xfrm xmlns:a="http://schemas.openxmlformats.org/drawingml/2006/main">
-            <a:off x="1714500" y="3667125"/>
-            <a:ext cx="9429750" cy="609600"/>
+                <a16:creationId xmlns:a16="http://schemas.microsoft.com/office/drawing/2014/main" id="{A98FE8FA-4B22-4503-9082-F7D5147D7120}"/>
+              </a:ext>
+            </a:extLst>
+          </p:cNvPr>
+          <p:cNvSpPr>
+            <a:spLocks xmlns:a="http://schemas.openxmlformats.org/drawingml/2006/main" noGrp="1"/>
+          </p:cNvSpPr>
+          <p:nvPr/>
+        </p:nvSpPr>
+        <p:spPr>
+          <a:xfrm xmlns:a="http://schemas.openxmlformats.org/drawingml/2006/main">
+            <a:off x="1714500" y="3867150"/>
+            <a:ext cx="9525000" cy="809625"/>
           </a:xfrm>
           <a:prstGeom xmlns:a="http://schemas.openxmlformats.org/drawingml/2006/main" prst="rect">
             <a:avLst/>
@@ -8671,7 +8677,7 @@
           <a:lstStyle xmlns:a="http://schemas.openxmlformats.org/drawingml/2006/main"/>
           <a:p xmlns:a="http://schemas.openxmlformats.org/drawingml/2006/main">
             <a:pPr algn="l">
-              <a:defRPr sz="1500" b="0">
+              <a:defRPr sz="1725" b="0">
                 <a:solidFill>
                   <a:srgbClr val="17253A"/>
                 </a:solidFill>
@@ -8681,7 +8687,7 @@
               </a:defRPr>
             </a:pPr>
             <a:r>
-              <a:rPr sz="1500" b="0">
+              <a:rPr sz="1725" b="0">
                 <a:solidFill>
                   <a:srgbClr val="17253A"/>
                 </a:solidFill>
@@ -8689,7 +8695,7 @@
                 <a:ea typeface="Arial"/>
                 <a:cs typeface="Arial"/>
               </a:rPr>
-              <a:t>Complete the calculation: 380,000 and 385,000.</a:t>
+              <a:t>384,650 to nearest 1,000: 650 ≥ 500</a:t>
             </a:r>
           </a:p>
         </p:txBody>
@@ -8699,28 +8705,30 @@
           <p:cNvPr id="20" name="">
             <a:extLst xmlns:a="http://schemas.openxmlformats.org/drawingml/2006/main">
               <a:ext uri="{FF2B5EF4-FFF2-40B4-BE49-F238E27FC236}">
-                <a16:creationId xmlns:a16="http://schemas.microsoft.com/office/drawing/2014/main" id="{4CF27199-5F56-45A6-8318-194D74689C04}"/>
-              </a:ext>
-            </a:extLst>
-          </p:cNvPr>
-          <p:cNvSpPr>
-            <a:spLocks xmlns:a="http://schemas.openxmlformats.org/drawingml/2006/main" noGrp="1"/>
-          </p:cNvSpPr>
-          <p:nvPr/>
-        </p:nvSpPr>
-        <p:spPr>
-          <a:xfrm xmlns:a="http://schemas.openxmlformats.org/drawingml/2006/main">
-            <a:off x="1000125" y="4476750"/>
-            <a:ext cx="476250" cy="476250"/>
-          </a:xfrm>
-          <a:prstGeom xmlns:a="http://schemas.openxmlformats.org/drawingml/2006/main" prst="ellipse">
+                <a16:creationId xmlns:a16="http://schemas.microsoft.com/office/drawing/2014/main" id="{D7A3F3A7-5B28-4916-9A27-579B9D67A609}"/>
+              </a:ext>
+            </a:extLst>
+          </p:cNvPr>
+          <p:cNvSpPr>
+            <a:spLocks xmlns:a="http://schemas.openxmlformats.org/drawingml/2006/main" noGrp="1"/>
+          </p:cNvSpPr>
+          <p:nvPr/>
+        </p:nvSpPr>
+        <p:spPr>
+          <a:xfrm xmlns:a="http://schemas.openxmlformats.org/drawingml/2006/main">
+            <a:off x="1714500" y="4695825"/>
+            <a:ext cx="9334500" cy="9525"/>
+          </a:xfrm>
+          <a:prstGeom xmlns:a="http://schemas.openxmlformats.org/drawingml/2006/main" prst="rect">
             <a:avLst/>
           </a:prstGeom>
           <a:solidFill xmlns:a="http://schemas.openxmlformats.org/drawingml/2006/main">
-            <a:srgbClr val="2C6E73"/>
+            <a:srgbClr val="D9E0E6"/>
           </a:solidFill>
           <a:ln xmlns:a="http://schemas.openxmlformats.org/drawingml/2006/main" w="0">
-            <a:noFill/>
+            <a:solidFill>
+              <a:srgbClr val="D9E0E6"/>
+            </a:solidFill>
           </a:ln>
         </p:spPr>
       </p:sp>
@@ -8729,19 +8737,19 @@
           <p:cNvPr id="21" name="">
             <a:extLst xmlns:a="http://schemas.openxmlformats.org/drawingml/2006/main">
               <a:ext uri="{FF2B5EF4-FFF2-40B4-BE49-F238E27FC236}">
-                <a16:creationId xmlns:a16="http://schemas.microsoft.com/office/drawing/2014/main" id="{94803C70-2187-4EA1-908E-1E3950074A25}"/>
-              </a:ext>
-            </a:extLst>
-          </p:cNvPr>
-          <p:cNvSpPr>
-            <a:spLocks xmlns:a="http://schemas.openxmlformats.org/drawingml/2006/main" noGrp="1"/>
-          </p:cNvSpPr>
-          <p:nvPr/>
-        </p:nvSpPr>
-        <p:spPr>
-          <a:xfrm xmlns:a="http://schemas.openxmlformats.org/drawingml/2006/main">
-            <a:off x="1000125" y="4505325"/>
-            <a:ext cx="476250" cy="419100"/>
+                <a16:creationId xmlns:a16="http://schemas.microsoft.com/office/drawing/2014/main" id="{93A40ED3-37D6-4DA1-B204-8DD17A3B854D}"/>
+              </a:ext>
+            </a:extLst>
+          </p:cNvPr>
+          <p:cNvSpPr>
+            <a:spLocks xmlns:a="http://schemas.openxmlformats.org/drawingml/2006/main" noGrp="1"/>
+          </p:cNvSpPr>
+          <p:nvPr/>
+        </p:nvSpPr>
+        <p:spPr>
+          <a:xfrm xmlns:a="http://schemas.openxmlformats.org/drawingml/2006/main">
+            <a:off x="1162050" y="4829175"/>
+            <a:ext cx="400050" cy="400050"/>
           </a:xfrm>
           <a:prstGeom xmlns:a="http://schemas.openxmlformats.org/drawingml/2006/main" prst="rect">
             <a:avLst/>
@@ -8758,9 +8766,9 @@
           <a:lstStyle xmlns:a="http://schemas.openxmlformats.org/drawingml/2006/main"/>
           <a:p xmlns:a="http://schemas.openxmlformats.org/drawingml/2006/main">
             <a:pPr algn="ctr">
-              <a:defRPr sz="1350" b="1">
-                <a:solidFill>
-                  <a:srgbClr val="FFFFFF"/>
+              <a:defRPr sz="1125" b="1">
+                <a:solidFill>
+                  <a:srgbClr val="2F785D"/>
                 </a:solidFill>
                 <a:latin typeface="Arial"/>
                 <a:ea typeface="Arial"/>
@@ -8768,9 +8776,9 @@
               </a:defRPr>
             </a:pPr>
             <a:r>
-              <a:rPr sz="1350" b="1">
-                <a:solidFill>
-                  <a:srgbClr val="FFFFFF"/>
+              <a:rPr sz="1125" b="1">
+                <a:solidFill>
+                  <a:srgbClr val="2F785D"/>
                 </a:solidFill>
                 <a:latin typeface="Arial"/>
                 <a:ea typeface="Arial"/>
@@ -8786,19 +8794,19 @@
           <p:cNvPr id="22" name="">
             <a:extLst xmlns:a="http://schemas.openxmlformats.org/drawingml/2006/main">
               <a:ext uri="{FF2B5EF4-FFF2-40B4-BE49-F238E27FC236}">
-                <a16:creationId xmlns:a16="http://schemas.microsoft.com/office/drawing/2014/main" id="{73788BA4-F0DE-4CC7-B3C9-679A80FAC810}"/>
-              </a:ext>
-            </a:extLst>
-          </p:cNvPr>
-          <p:cNvSpPr>
-            <a:spLocks xmlns:a="http://schemas.openxmlformats.org/drawingml/2006/main" noGrp="1"/>
-          </p:cNvSpPr>
-          <p:nvPr/>
-        </p:nvSpPr>
-        <p:spPr>
-          <a:xfrm xmlns:a="http://schemas.openxmlformats.org/drawingml/2006/main">
-            <a:off x="1714500" y="4410075"/>
-            <a:ext cx="9429750" cy="609600"/>
+                <a16:creationId xmlns:a16="http://schemas.microsoft.com/office/drawing/2014/main" id="{BB73EBF9-B8DA-48EB-A858-66A17B992894}"/>
+              </a:ext>
+            </a:extLst>
+          </p:cNvPr>
+          <p:cNvSpPr>
+            <a:spLocks xmlns:a="http://schemas.openxmlformats.org/drawingml/2006/main" noGrp="1"/>
+          </p:cNvSpPr>
+          <p:nvPr/>
+        </p:nvSpPr>
+        <p:spPr>
+          <a:xfrm xmlns:a="http://schemas.openxmlformats.org/drawingml/2006/main">
+            <a:off x="1714500" y="4743450"/>
+            <a:ext cx="9525000" cy="809625"/>
           </a:xfrm>
           <a:prstGeom xmlns:a="http://schemas.openxmlformats.org/drawingml/2006/main" prst="rect">
             <a:avLst/>
@@ -8815,7 +8823,7 @@
           <a:lstStyle xmlns:a="http://schemas.openxmlformats.org/drawingml/2006/main"/>
           <a:p xmlns:a="http://schemas.openxmlformats.org/drawingml/2006/main">
             <a:pPr algn="l">
-              <a:defRPr sz="1500" b="1">
+              <a:defRPr sz="1725" b="1">
                 <a:solidFill>
                   <a:srgbClr val="2F785D"/>
                 </a:solidFill>
@@ -8825,7 +8833,7 @@
               </a:defRPr>
             </a:pPr>
             <a:r>
-              <a:rPr sz="1500" b="1">
+              <a:rPr sz="1725" b="1">
                 <a:solidFill>
                   <a:srgbClr val="2F785D"/>
                 </a:solidFill>
@@ -8833,7 +8841,7 @@
                 <a:ea typeface="Arial"/>
                 <a:cs typeface="Arial"/>
               </a:rPr>
-              <a:t>Check the result: Round to the nearer multiple and replace following digits with zeros.</a:t>
+              <a:t>384,650 → 385,000</a:t>
             </a:r>
           </a:p>
         </p:txBody>
@@ -8841,7 +8849,7 @@
     </p:spTree>
     <p:extLst>
       <p:ext uri="{BB962C8B-B14F-4D97-AF65-F5344CB8AC3E}">
-        <p14:creationId xmlns:p14="http://schemas.microsoft.com/office/powerpoint/2010/main" val="1438831585"/>
+        <p14:creationId xmlns:p14="http://schemas.microsoft.com/office/powerpoint/2010/main" val="8444751"/>
       </p:ext>
     </p:extLst>
   </p:cSld>
@@ -9134,7 +9142,7 @@
           <p:cNvPr id="15" name="">
             <a:extLst xmlns:a="http://schemas.openxmlformats.org/drawingml/2006/main">
               <a:ext uri="{FF2B5EF4-FFF2-40B4-BE49-F238E27FC236}">
-                <a16:creationId xmlns:a16="http://schemas.microsoft.com/office/drawing/2014/main" id="{D6DD022D-3008-4118-8483-B5C54204183A}"/>
+                <a16:creationId xmlns:a16="http://schemas.microsoft.com/office/drawing/2014/main" id="{B1897BCB-6482-4BDC-85B9-216043BE7CB9}"/>
               </a:ext>
             </a:extLst>
           </p:cNvPr>
@@ -9166,7 +9174,7 @@
           <p:cNvPr id="2" name="">
             <a:extLst xmlns:a="http://schemas.openxmlformats.org/drawingml/2006/main">
               <a:ext uri="{FF2B5EF4-FFF2-40B4-BE49-F238E27FC236}">
-                <a16:creationId xmlns:a16="http://schemas.microsoft.com/office/drawing/2014/main" id="{8C5C5CE7-5815-4F4E-8964-FDC082E4A358}"/>
+                <a16:creationId xmlns:a16="http://schemas.microsoft.com/office/drawing/2014/main" id="{343BFFE2-A13F-45AB-B9EB-782DCB8D2CF0}"/>
               </a:ext>
             </a:extLst>
           </p:cNvPr>
@@ -9223,7 +9231,7 @@
           <p:cNvPr id="3" name="">
             <a:extLst xmlns:a="http://schemas.openxmlformats.org/drawingml/2006/main">
               <a:ext uri="{FF2B5EF4-FFF2-40B4-BE49-F238E27FC236}">
-                <a16:creationId xmlns:a16="http://schemas.microsoft.com/office/drawing/2014/main" id="{84052CDE-DA73-41A7-8B60-B2C297FACFE6}"/>
+                <a16:creationId xmlns:a16="http://schemas.microsoft.com/office/drawing/2014/main" id="{EEDED90F-0198-4E27-A346-6D0C20E049F6}"/>
               </a:ext>
             </a:extLst>
           </p:cNvPr>
@@ -9255,7 +9263,7 @@
           <p:cNvPr id="4" name="">
             <a:extLst xmlns:a="http://schemas.openxmlformats.org/drawingml/2006/main">
               <a:ext uri="{FF2B5EF4-FFF2-40B4-BE49-F238E27FC236}">
-                <a16:creationId xmlns:a16="http://schemas.microsoft.com/office/drawing/2014/main" id="{FCB82869-1303-41FB-A9E3-E007B42105FE}"/>
+                <a16:creationId xmlns:a16="http://schemas.microsoft.com/office/drawing/2014/main" id="{F202F27B-0B20-45B9-9686-830967812D8B}"/>
               </a:ext>
             </a:extLst>
           </p:cNvPr>
@@ -9312,7 +9320,7 @@
           <p:cNvPr id="5" name="">
             <a:extLst xmlns:a="http://schemas.openxmlformats.org/drawingml/2006/main">
               <a:ext uri="{FF2B5EF4-FFF2-40B4-BE49-F238E27FC236}">
-                <a16:creationId xmlns:a16="http://schemas.microsoft.com/office/drawing/2014/main" id="{0FAF15DF-3AE7-48A3-BFDF-95AD61DFB361}"/>
+                <a16:creationId xmlns:a16="http://schemas.microsoft.com/office/drawing/2014/main" id="{483B1A40-CD5E-4DE2-90D5-4A27C07FD524}"/>
               </a:ext>
             </a:extLst>
           </p:cNvPr>
@@ -9369,7 +9377,7 @@
           <p:cNvPr id="6" name="">
             <a:extLst xmlns:a="http://schemas.openxmlformats.org/drawingml/2006/main">
               <a:ext uri="{FF2B5EF4-FFF2-40B4-BE49-F238E27FC236}">
-                <a16:creationId xmlns:a16="http://schemas.microsoft.com/office/drawing/2014/main" id="{7BAA6581-AFC2-4AC2-8CA2-EB8D48BE5961}"/>
+                <a16:creationId xmlns:a16="http://schemas.microsoft.com/office/drawing/2014/main" id="{4C65DF62-0112-4DD5-B715-96E04DC4DFA7}"/>
               </a:ext>
             </a:extLst>
           </p:cNvPr>
@@ -9426,7 +9434,7 @@
           <p:cNvPr id="7" name="">
             <a:extLst xmlns:a="http://schemas.openxmlformats.org/drawingml/2006/main">
               <a:ext uri="{FF2B5EF4-FFF2-40B4-BE49-F238E27FC236}">
-                <a16:creationId xmlns:a16="http://schemas.microsoft.com/office/drawing/2014/main" id="{6CB5AA50-D96F-40B6-B945-9971433B4254}"/>
+                <a16:creationId xmlns:a16="http://schemas.microsoft.com/office/drawing/2014/main" id="{40C5A3CC-7894-45A3-B647-DBE1C178C117}"/>
               </a:ext>
             </a:extLst>
           </p:cNvPr>
@@ -9458,7 +9466,7 @@
           <p:cNvPr id="8" name="">
             <a:extLst xmlns:a="http://schemas.openxmlformats.org/drawingml/2006/main">
               <a:ext uri="{FF2B5EF4-FFF2-40B4-BE49-F238E27FC236}">
-                <a16:creationId xmlns:a16="http://schemas.microsoft.com/office/drawing/2014/main" id="{6D3A833A-E7B7-4E6F-A301-C6D7A08338F6}"/>
+                <a16:creationId xmlns:a16="http://schemas.microsoft.com/office/drawing/2014/main" id="{6AA09AE0-9799-4AA7-8CB0-1B41C437BB84}"/>
               </a:ext>
             </a:extLst>
           </p:cNvPr>
@@ -9515,7 +9523,7 @@
           <p:cNvPr id="9" name="">
             <a:extLst xmlns:a="http://schemas.openxmlformats.org/drawingml/2006/main">
               <a:ext uri="{FF2B5EF4-FFF2-40B4-BE49-F238E27FC236}">
-                <a16:creationId xmlns:a16="http://schemas.microsoft.com/office/drawing/2014/main" id="{653B177E-67CE-44A0-8DFF-600AB4F4AD2F}"/>
+                <a16:creationId xmlns:a16="http://schemas.microsoft.com/office/drawing/2014/main" id="{A207E372-643E-4918-BE4E-E3999D67A856}"/>
               </a:ext>
             </a:extLst>
           </p:cNvPr>
@@ -9572,7 +9580,7 @@
           <p:cNvPr id="10" name="">
             <a:extLst xmlns:a="http://schemas.openxmlformats.org/drawingml/2006/main">
               <a:ext uri="{FF2B5EF4-FFF2-40B4-BE49-F238E27FC236}">
-                <a16:creationId xmlns:a16="http://schemas.microsoft.com/office/drawing/2014/main" id="{DAEF327E-D15A-4327-8AA1-586ECECA0B27}"/>
+                <a16:creationId xmlns:a16="http://schemas.microsoft.com/office/drawing/2014/main" id="{7156DECC-29EA-4361-96F1-5FC6168C567D}"/>
               </a:ext>
             </a:extLst>
           </p:cNvPr>
@@ -9629,7 +9637,7 @@
           <p:cNvPr id="11" name="">
             <a:extLst xmlns:a="http://schemas.openxmlformats.org/drawingml/2006/main">
               <a:ext uri="{FF2B5EF4-FFF2-40B4-BE49-F238E27FC236}">
-                <a16:creationId xmlns:a16="http://schemas.microsoft.com/office/drawing/2014/main" id="{964ECEA3-5BEE-456F-AD0D-AFA9A2E943BD}"/>
+                <a16:creationId xmlns:a16="http://schemas.microsoft.com/office/drawing/2014/main" id="{C366919A-AD7A-4B15-B007-AB7689AB496A}"/>
               </a:ext>
             </a:extLst>
           </p:cNvPr>
@@ -9686,7 +9694,7 @@
           <p:cNvPr id="12" name="">
             <a:extLst xmlns:a="http://schemas.openxmlformats.org/drawingml/2006/main">
               <a:ext uri="{FF2B5EF4-FFF2-40B4-BE49-F238E27FC236}">
-                <a16:creationId xmlns:a16="http://schemas.microsoft.com/office/drawing/2014/main" id="{446CDE3C-777F-42D5-B044-35D2A7EBA975}"/>
+                <a16:creationId xmlns:a16="http://schemas.microsoft.com/office/drawing/2014/main" id="{0A932836-A535-43E3-A540-0CB9F060278A}"/>
               </a:ext>
             </a:extLst>
           </p:cNvPr>
@@ -9718,7 +9726,7 @@
           <p:cNvPr id="13" name="">
             <a:extLst xmlns:a="http://schemas.openxmlformats.org/drawingml/2006/main">
               <a:ext uri="{FF2B5EF4-FFF2-40B4-BE49-F238E27FC236}">
-                <a16:creationId xmlns:a16="http://schemas.microsoft.com/office/drawing/2014/main" id="{54CD1325-FE0E-424F-8187-E39CE47C0066}"/>
+                <a16:creationId xmlns:a16="http://schemas.microsoft.com/office/drawing/2014/main" id="{BFE9700A-727B-4E43-A0EB-286F9470D90F}"/>
               </a:ext>
             </a:extLst>
           </p:cNvPr>
@@ -9775,7 +9783,7 @@
           <p:cNvPr id="14" name="">
             <a:extLst xmlns:a="http://schemas.openxmlformats.org/drawingml/2006/main">
               <a:ext uri="{FF2B5EF4-FFF2-40B4-BE49-F238E27FC236}">
-                <a16:creationId xmlns:a16="http://schemas.microsoft.com/office/drawing/2014/main" id="{C4BB1086-3421-46FE-B0AA-1D6BF755104A}"/>
+                <a16:creationId xmlns:a16="http://schemas.microsoft.com/office/drawing/2014/main" id="{635231FF-61D7-4178-8D08-F20E499A84DB}"/>
               </a:ext>
             </a:extLst>
           </p:cNvPr>
@@ -9830,7 +9838,7 @@
     </p:spTree>
     <p:extLst>
       <p:ext uri="{BB962C8B-B14F-4D97-AF65-F5344CB8AC3E}">
-        <p14:creationId xmlns:p14="http://schemas.microsoft.com/office/powerpoint/2010/main" val="123906208"/>
+        <p14:creationId xmlns:p14="http://schemas.microsoft.com/office/powerpoint/2010/main" val="141284760"/>
       </p:ext>
     </p:extLst>
   </p:cSld>
@@ -10031,7 +10039,7 @@
           <p:cNvPr id="16" name="">
             <a:extLst xmlns:a="http://schemas.openxmlformats.org/drawingml/2006/main">
               <a:ext uri="{FF2B5EF4-FFF2-40B4-BE49-F238E27FC236}">
-                <a16:creationId xmlns:a16="http://schemas.microsoft.com/office/drawing/2014/main" id="{BC17D9A2-4B26-4B28-8D03-7DCD61B154E4}"/>
+                <a16:creationId xmlns:a16="http://schemas.microsoft.com/office/drawing/2014/main" id="{D6E37A26-1323-4F29-8CAF-D2A14B105893}"/>
               </a:ext>
             </a:extLst>
           </p:cNvPr>
@@ -10063,7 +10071,7 @@
           <p:cNvPr id="2" name="">
             <a:extLst xmlns:a="http://schemas.openxmlformats.org/drawingml/2006/main">
               <a:ext uri="{FF2B5EF4-FFF2-40B4-BE49-F238E27FC236}">
-                <a16:creationId xmlns:a16="http://schemas.microsoft.com/office/drawing/2014/main" id="{BC66EE80-91F3-4A4F-A2BB-3B8418AD0556}"/>
+                <a16:creationId xmlns:a16="http://schemas.microsoft.com/office/drawing/2014/main" id="{530D1727-F5F2-438B-A623-A1C6BB0C109C}"/>
               </a:ext>
             </a:extLst>
           </p:cNvPr>
@@ -10120,7 +10128,7 @@
           <p:cNvPr id="3" name="">
             <a:extLst xmlns:a="http://schemas.openxmlformats.org/drawingml/2006/main">
               <a:ext uri="{FF2B5EF4-FFF2-40B4-BE49-F238E27FC236}">
-                <a16:creationId xmlns:a16="http://schemas.microsoft.com/office/drawing/2014/main" id="{4F49F92F-9E12-460C-9C97-5C581C30CF5B}"/>
+                <a16:creationId xmlns:a16="http://schemas.microsoft.com/office/drawing/2014/main" id="{D7F95514-983D-4B1C-B17C-2DCA5B05FDD6}"/>
               </a:ext>
             </a:extLst>
           </p:cNvPr>
@@ -10152,7 +10160,7 @@
           <p:cNvPr id="4" name="">
             <a:extLst xmlns:a="http://schemas.openxmlformats.org/drawingml/2006/main">
               <a:ext uri="{FF2B5EF4-FFF2-40B4-BE49-F238E27FC236}">
-                <a16:creationId xmlns:a16="http://schemas.microsoft.com/office/drawing/2014/main" id="{1EDAAC8A-6C01-4C70-9535-0786AA86C2E9}"/>
+                <a16:creationId xmlns:a16="http://schemas.microsoft.com/office/drawing/2014/main" id="{7E239C07-F715-475E-9EEA-0F5ADE9D7DC5}"/>
               </a:ext>
             </a:extLst>
           </p:cNvPr>
@@ -10209,7 +10217,7 @@
           <p:cNvPr id="5" name="">
             <a:extLst xmlns:a="http://schemas.openxmlformats.org/drawingml/2006/main">
               <a:ext uri="{FF2B5EF4-FFF2-40B4-BE49-F238E27FC236}">
-                <a16:creationId xmlns:a16="http://schemas.microsoft.com/office/drawing/2014/main" id="{4FAF568A-FADC-414E-8F81-DC5490845E70}"/>
+                <a16:creationId xmlns:a16="http://schemas.microsoft.com/office/drawing/2014/main" id="{CA91A959-26B3-4DEF-AE30-3A52A7D4E058}"/>
               </a:ext>
             </a:extLst>
           </p:cNvPr>
@@ -10266,7 +10274,7 @@
           <p:cNvPr id="6" name="">
             <a:extLst xmlns:a="http://schemas.openxmlformats.org/drawingml/2006/main">
               <a:ext uri="{FF2B5EF4-FFF2-40B4-BE49-F238E27FC236}">
-                <a16:creationId xmlns:a16="http://schemas.microsoft.com/office/drawing/2014/main" id="{F22FD851-246D-4CBB-AF47-D62E6300FF2C}"/>
+                <a16:creationId xmlns:a16="http://schemas.microsoft.com/office/drawing/2014/main" id="{A28ECD79-3361-4D3C-9408-8C4654FC55C4}"/>
               </a:ext>
             </a:extLst>
           </p:cNvPr>
@@ -10323,7 +10331,7 @@
           <p:cNvPr id="7" name="">
             <a:extLst xmlns:a="http://schemas.openxmlformats.org/drawingml/2006/main">
               <a:ext uri="{FF2B5EF4-FFF2-40B4-BE49-F238E27FC236}">
-                <a16:creationId xmlns:a16="http://schemas.microsoft.com/office/drawing/2014/main" id="{72175F42-132D-4DB6-BE05-47D2730FC8F1}"/>
+                <a16:creationId xmlns:a16="http://schemas.microsoft.com/office/drawing/2014/main" id="{BCC04832-5D2A-466D-9C54-7B38CEF2BF2D}"/>
               </a:ext>
             </a:extLst>
           </p:cNvPr>
@@ -10355,7 +10363,7 @@
           <p:cNvPr id="8" name="">
             <a:extLst xmlns:a="http://schemas.openxmlformats.org/drawingml/2006/main">
               <a:ext uri="{FF2B5EF4-FFF2-40B4-BE49-F238E27FC236}">
-                <a16:creationId xmlns:a16="http://schemas.microsoft.com/office/drawing/2014/main" id="{D61CA197-62E3-494B-AFF9-698C39A9FCAC}"/>
+                <a16:creationId xmlns:a16="http://schemas.microsoft.com/office/drawing/2014/main" id="{5A43B5DE-2273-4ED1-A37F-37D8A9986095}"/>
               </a:ext>
             </a:extLst>
           </p:cNvPr>
@@ -10412,7 +10420,7 @@
           <p:cNvPr id="9" name="">
             <a:extLst xmlns:a="http://schemas.openxmlformats.org/drawingml/2006/main">
               <a:ext uri="{FF2B5EF4-FFF2-40B4-BE49-F238E27FC236}">
-                <a16:creationId xmlns:a16="http://schemas.microsoft.com/office/drawing/2014/main" id="{EBB80D7F-B025-4E23-9C73-818EBC1F35CE}"/>
+                <a16:creationId xmlns:a16="http://schemas.microsoft.com/office/drawing/2014/main" id="{5B2DF40B-8530-4E38-9BA5-171B55C72BDA}"/>
               </a:ext>
             </a:extLst>
           </p:cNvPr>
@@ -10469,7 +10477,7 @@
           <p:cNvPr id="10" name="">
             <a:extLst xmlns:a="http://schemas.openxmlformats.org/drawingml/2006/main">
               <a:ext uri="{FF2B5EF4-FFF2-40B4-BE49-F238E27FC236}">
-                <a16:creationId xmlns:a16="http://schemas.microsoft.com/office/drawing/2014/main" id="{E1F3DBC2-B9D6-4379-9417-846656CCE46E}"/>
+                <a16:creationId xmlns:a16="http://schemas.microsoft.com/office/drawing/2014/main" id="{21647A90-4D0A-4763-92B2-8B4F98321824}"/>
               </a:ext>
             </a:extLst>
           </p:cNvPr>
@@ -10526,7 +10534,7 @@
           <p:cNvPr id="11" name="">
             <a:extLst xmlns:a="http://schemas.openxmlformats.org/drawingml/2006/main">
               <a:ext uri="{FF2B5EF4-FFF2-40B4-BE49-F238E27FC236}">
-                <a16:creationId xmlns:a16="http://schemas.microsoft.com/office/drawing/2014/main" id="{13661963-EDE8-4BC6-AEB2-D96B462D6ADE}"/>
+                <a16:creationId xmlns:a16="http://schemas.microsoft.com/office/drawing/2014/main" id="{4B73965F-C445-406C-9E31-9DC25F1D54C0}"/>
               </a:ext>
             </a:extLst>
           </p:cNvPr>
@@ -10583,7 +10591,7 @@
           <p:cNvPr id="12" name="">
             <a:extLst xmlns:a="http://schemas.openxmlformats.org/drawingml/2006/main">
               <a:ext uri="{FF2B5EF4-FFF2-40B4-BE49-F238E27FC236}">
-                <a16:creationId xmlns:a16="http://schemas.microsoft.com/office/drawing/2014/main" id="{C1EFE290-0B30-4B7A-B26D-D196C0E6E03D}"/>
+                <a16:creationId xmlns:a16="http://schemas.microsoft.com/office/drawing/2014/main" id="{E190F8D9-625D-4195-AF72-D2C9E7148930}"/>
               </a:ext>
             </a:extLst>
           </p:cNvPr>
@@ -10640,7 +10648,7 @@
           <p:cNvPr id="13" name="">
             <a:extLst xmlns:a="http://schemas.openxmlformats.org/drawingml/2006/main">
               <a:ext uri="{FF2B5EF4-FFF2-40B4-BE49-F238E27FC236}">
-                <a16:creationId xmlns:a16="http://schemas.microsoft.com/office/drawing/2014/main" id="{DB0A180B-9136-4C41-8B64-F5ADB829F066}"/>
+                <a16:creationId xmlns:a16="http://schemas.microsoft.com/office/drawing/2014/main" id="{0E8E48B6-FA49-4674-93EC-D9BC648109FD}"/>
               </a:ext>
             </a:extLst>
           </p:cNvPr>
@@ -10697,7 +10705,7 @@
           <p:cNvPr id="14" name="">
             <a:extLst xmlns:a="http://schemas.openxmlformats.org/drawingml/2006/main">
               <a:ext uri="{FF2B5EF4-FFF2-40B4-BE49-F238E27FC236}">
-                <a16:creationId xmlns:a16="http://schemas.microsoft.com/office/drawing/2014/main" id="{6E3AC3DF-3189-4491-92D9-92833E2A7C7C}"/>
+                <a16:creationId xmlns:a16="http://schemas.microsoft.com/office/drawing/2014/main" id="{D1AA4789-36BF-4FA4-84FE-8E06024F027D}"/>
               </a:ext>
             </a:extLst>
           </p:cNvPr>
@@ -10754,7 +10762,7 @@
           <p:cNvPr id="15" name="">
             <a:extLst xmlns:a="http://schemas.openxmlformats.org/drawingml/2006/main">
               <a:ext uri="{FF2B5EF4-FFF2-40B4-BE49-F238E27FC236}">
-                <a16:creationId xmlns:a16="http://schemas.microsoft.com/office/drawing/2014/main" id="{AE2CADDE-F028-4F74-B3E7-1C248DBB26F8}"/>
+                <a16:creationId xmlns:a16="http://schemas.microsoft.com/office/drawing/2014/main" id="{3FA04C12-C208-4A34-94CE-CE66D07EA4B1}"/>
               </a:ext>
             </a:extLst>
           </p:cNvPr>
@@ -10809,7 +10817,7 @@
     </p:spTree>
     <p:extLst>
       <p:ext uri="{BB962C8B-B14F-4D97-AF65-F5344CB8AC3E}">
-        <p14:creationId xmlns:p14="http://schemas.microsoft.com/office/powerpoint/2010/main" val="1862104183"/>
+        <p14:creationId xmlns:p14="http://schemas.microsoft.com/office/powerpoint/2010/main" val="957159011"/>
       </p:ext>
     </p:extLst>
   </p:cSld>
@@ -10964,7 +10972,7 @@
           <p:cNvPr id="16" name="">
             <a:extLst xmlns:a="http://schemas.openxmlformats.org/drawingml/2006/main">
               <a:ext uri="{FF2B5EF4-FFF2-40B4-BE49-F238E27FC236}">
-                <a16:creationId xmlns:a16="http://schemas.microsoft.com/office/drawing/2014/main" id="{D526F8F9-C068-4515-9705-2B766FF7D11F}"/>
+                <a16:creationId xmlns:a16="http://schemas.microsoft.com/office/drawing/2014/main" id="{066BFD40-CDB7-4A1E-A999-3DCAF4A026CB}"/>
               </a:ext>
             </a:extLst>
           </p:cNvPr>
@@ -10996,7 +11004,7 @@
           <p:cNvPr id="2" name="">
             <a:extLst xmlns:a="http://schemas.openxmlformats.org/drawingml/2006/main">
               <a:ext uri="{FF2B5EF4-FFF2-40B4-BE49-F238E27FC236}">
-                <a16:creationId xmlns:a16="http://schemas.microsoft.com/office/drawing/2014/main" id="{AB55292A-A424-4CB0-B57B-D5EF7DFC1945}"/>
+                <a16:creationId xmlns:a16="http://schemas.microsoft.com/office/drawing/2014/main" id="{6DF2941E-4CF8-4E7B-9374-F69FB6DB03B2}"/>
               </a:ext>
             </a:extLst>
           </p:cNvPr>
@@ -11053,7 +11061,7 @@
           <p:cNvPr id="3" name="">
             <a:extLst xmlns:a="http://schemas.openxmlformats.org/drawingml/2006/main">
               <a:ext uri="{FF2B5EF4-FFF2-40B4-BE49-F238E27FC236}">
-                <a16:creationId xmlns:a16="http://schemas.microsoft.com/office/drawing/2014/main" id="{4B5A556D-1B15-41CE-94E6-B08FC804470A}"/>
+                <a16:creationId xmlns:a16="http://schemas.microsoft.com/office/drawing/2014/main" id="{5EE7B01A-1B00-440F-9C8C-EFD74FC87E20}"/>
               </a:ext>
             </a:extLst>
           </p:cNvPr>
@@ -11085,7 +11093,7 @@
           <p:cNvPr id="4" name="">
             <a:extLst xmlns:a="http://schemas.openxmlformats.org/drawingml/2006/main">
               <a:ext uri="{FF2B5EF4-FFF2-40B4-BE49-F238E27FC236}">
-                <a16:creationId xmlns:a16="http://schemas.microsoft.com/office/drawing/2014/main" id="{A6EE82FC-4A27-4DDC-B37C-DB56F28B0F45}"/>
+                <a16:creationId xmlns:a16="http://schemas.microsoft.com/office/drawing/2014/main" id="{161130CE-8BB2-47B1-A0FA-935BDE39975B}"/>
               </a:ext>
             </a:extLst>
           </p:cNvPr>
@@ -11142,7 +11150,7 @@
           <p:cNvPr id="5" name="">
             <a:extLst xmlns:a="http://schemas.openxmlformats.org/drawingml/2006/main">
               <a:ext uri="{FF2B5EF4-FFF2-40B4-BE49-F238E27FC236}">
-                <a16:creationId xmlns:a16="http://schemas.microsoft.com/office/drawing/2014/main" id="{CB6E0B26-914A-404B-ACD0-9404AD29279D}"/>
+                <a16:creationId xmlns:a16="http://schemas.microsoft.com/office/drawing/2014/main" id="{5FDE2090-E798-4BE8-ABE0-A3B3C212F31D}"/>
               </a:ext>
             </a:extLst>
           </p:cNvPr>
@@ -11199,7 +11207,7 @@
           <p:cNvPr id="6" name="">
             <a:extLst xmlns:a="http://schemas.openxmlformats.org/drawingml/2006/main">
               <a:ext uri="{FF2B5EF4-FFF2-40B4-BE49-F238E27FC236}">
-                <a16:creationId xmlns:a16="http://schemas.microsoft.com/office/drawing/2014/main" id="{0200BF87-0D7F-4270-B4F0-832C139D7147}"/>
+                <a16:creationId xmlns:a16="http://schemas.microsoft.com/office/drawing/2014/main" id="{6DDB2619-8BE5-4AB8-8805-ED526B1F1E4F}"/>
               </a:ext>
             </a:extLst>
           </p:cNvPr>
@@ -11256,7 +11264,7 @@
           <p:cNvPr id="7" name="">
             <a:extLst xmlns:a="http://schemas.openxmlformats.org/drawingml/2006/main">
               <a:ext uri="{FF2B5EF4-FFF2-40B4-BE49-F238E27FC236}">
-                <a16:creationId xmlns:a16="http://schemas.microsoft.com/office/drawing/2014/main" id="{E54826B6-01E9-4AB0-A96A-ACCCE9E98734}"/>
+                <a16:creationId xmlns:a16="http://schemas.microsoft.com/office/drawing/2014/main" id="{A758C554-4E9D-4287-BB1C-8CBEF9CFF04F}"/>
               </a:ext>
             </a:extLst>
           </p:cNvPr>
@@ -11288,7 +11296,7 @@
           <p:cNvPr id="8" name="">
             <a:extLst xmlns:a="http://schemas.openxmlformats.org/drawingml/2006/main">
               <a:ext uri="{FF2B5EF4-FFF2-40B4-BE49-F238E27FC236}">
-                <a16:creationId xmlns:a16="http://schemas.microsoft.com/office/drawing/2014/main" id="{B779445E-51AF-426D-8770-64B22988F239}"/>
+                <a16:creationId xmlns:a16="http://schemas.microsoft.com/office/drawing/2014/main" id="{05815698-C668-4D45-B28D-5F56CD8A0113}"/>
               </a:ext>
             </a:extLst>
           </p:cNvPr>
@@ -11345,7 +11353,7 @@
           <p:cNvPr id="9" name="">
             <a:extLst xmlns:a="http://schemas.openxmlformats.org/drawingml/2006/main">
               <a:ext uri="{FF2B5EF4-FFF2-40B4-BE49-F238E27FC236}">
-                <a16:creationId xmlns:a16="http://schemas.microsoft.com/office/drawing/2014/main" id="{4436086F-52BB-4B5C-B38B-63B2CAD93145}"/>
+                <a16:creationId xmlns:a16="http://schemas.microsoft.com/office/drawing/2014/main" id="{BDACF711-C377-4A6F-9194-14EF5F968F6C}"/>
               </a:ext>
             </a:extLst>
           </p:cNvPr>
@@ -11406,7 +11414,7 @@
           <p:nvPr/>
         </p:nvPicPr>
         <p:blipFill>
-          <a:blip xmlns:r="http://schemas.openxmlformats.org/officeDocument/2006/relationships" xmlns:a="http://schemas.openxmlformats.org/drawingml/2006/main" r:embed="R72de8c3482764164"/>
+          <a:blip xmlns:r="http://schemas.openxmlformats.org/officeDocument/2006/relationships" xmlns:a="http://schemas.openxmlformats.org/drawingml/2006/main" r:embed="R305c6f4a9e2248aa"/>
           <a:stretch xmlns:a="http://schemas.openxmlformats.org/drawingml/2006/main"/>
         </p:blipFill>
         <p:spPr>
@@ -11424,7 +11432,7 @@
           <p:cNvPr id="11" name="">
             <a:extLst xmlns:a="http://schemas.openxmlformats.org/drawingml/2006/main">
               <a:ext uri="{FF2B5EF4-FFF2-40B4-BE49-F238E27FC236}">
-                <a16:creationId xmlns:a16="http://schemas.microsoft.com/office/drawing/2014/main" id="{9F57C6D8-7274-4033-BF8A-20A9CFC87C5E}"/>
+                <a16:creationId xmlns:a16="http://schemas.microsoft.com/office/drawing/2014/main" id="{C0DC6684-4785-421B-BB37-A6EE896AFADD}"/>
               </a:ext>
             </a:extLst>
           </p:cNvPr>
@@ -11481,7 +11489,7 @@
           <p:cNvPr id="12" name="">
             <a:extLst xmlns:a="http://schemas.openxmlformats.org/drawingml/2006/main">
               <a:ext uri="{FF2B5EF4-FFF2-40B4-BE49-F238E27FC236}">
-                <a16:creationId xmlns:a16="http://schemas.microsoft.com/office/drawing/2014/main" id="{929620F1-3A19-411B-B1BD-A4EEB209A2B7}"/>
+                <a16:creationId xmlns:a16="http://schemas.microsoft.com/office/drawing/2014/main" id="{745E0C2E-43CD-4038-BF15-104D737D8964}"/>
               </a:ext>
             </a:extLst>
           </p:cNvPr>
@@ -11538,7 +11546,7 @@
           <p:cNvPr id="13" name="">
             <a:extLst xmlns:a="http://schemas.openxmlformats.org/drawingml/2006/main">
               <a:ext uri="{FF2B5EF4-FFF2-40B4-BE49-F238E27FC236}">
-                <a16:creationId xmlns:a16="http://schemas.microsoft.com/office/drawing/2014/main" id="{DF886ED7-DFC4-4864-A6B1-E670A565A6BF}"/>
+                <a16:creationId xmlns:a16="http://schemas.microsoft.com/office/drawing/2014/main" id="{1E5DD38A-6F45-4BD8-B33D-CF4EA7CBC874}"/>
               </a:ext>
             </a:extLst>
           </p:cNvPr>
@@ -11570,7 +11578,7 @@
           <p:cNvPr id="14" name="">
             <a:extLst xmlns:a="http://schemas.openxmlformats.org/drawingml/2006/main">
               <a:ext uri="{FF2B5EF4-FFF2-40B4-BE49-F238E27FC236}">
-                <a16:creationId xmlns:a16="http://schemas.microsoft.com/office/drawing/2014/main" id="{CEDBEB16-258E-46C1-A387-19B4F3519722}"/>
+                <a16:creationId xmlns:a16="http://schemas.microsoft.com/office/drawing/2014/main" id="{DBCE928D-95F6-4C80-A9B0-61C437259B9F}"/>
               </a:ext>
             </a:extLst>
           </p:cNvPr>
@@ -11627,7 +11635,7 @@
           <p:cNvPr id="15" name="">
             <a:extLst xmlns:a="http://schemas.openxmlformats.org/drawingml/2006/main">
               <a:ext uri="{FF2B5EF4-FFF2-40B4-BE49-F238E27FC236}">
-                <a16:creationId xmlns:a16="http://schemas.microsoft.com/office/drawing/2014/main" id="{7D85D8B8-D9F0-4211-99F2-61D5D4EC6400}"/>
+                <a16:creationId xmlns:a16="http://schemas.microsoft.com/office/drawing/2014/main" id="{8AB00B1B-2ABA-4BE9-8D90-13F93F36C2A7}"/>
               </a:ext>
             </a:extLst>
           </p:cNvPr>
@@ -11682,7 +11690,7 @@
     </p:spTree>
     <p:extLst>
       <p:ext uri="{BB962C8B-B14F-4D97-AF65-F5344CB8AC3E}">
-        <p14:creationId xmlns:p14="http://schemas.microsoft.com/office/powerpoint/2010/main" val="392360189"/>
+        <p14:creationId xmlns:p14="http://schemas.microsoft.com/office/powerpoint/2010/main" val="543008290"/>
       </p:ext>
     </p:extLst>
   </p:cSld>
@@ -11837,7 +11845,7 @@
           <p:cNvPr id="23" name="">
             <a:extLst xmlns:a="http://schemas.openxmlformats.org/drawingml/2006/main">
               <a:ext uri="{FF2B5EF4-FFF2-40B4-BE49-F238E27FC236}">
-                <a16:creationId xmlns:a16="http://schemas.microsoft.com/office/drawing/2014/main" id="{178FDAA9-5ACD-42C5-855F-9ECC4C7B8AC2}"/>
+                <a16:creationId xmlns:a16="http://schemas.microsoft.com/office/drawing/2014/main" id="{7343E048-8AD3-4770-AE37-8A1421BF707E}"/>
               </a:ext>
             </a:extLst>
           </p:cNvPr>
@@ -11869,7 +11877,7 @@
           <p:cNvPr id="2" name="">
             <a:extLst xmlns:a="http://schemas.openxmlformats.org/drawingml/2006/main">
               <a:ext uri="{FF2B5EF4-FFF2-40B4-BE49-F238E27FC236}">
-                <a16:creationId xmlns:a16="http://schemas.microsoft.com/office/drawing/2014/main" id="{AB884DAF-0C59-4034-A82B-8319F57FADCC}"/>
+                <a16:creationId xmlns:a16="http://schemas.microsoft.com/office/drawing/2014/main" id="{4D305BA5-C303-43E7-9686-177F23126305}"/>
               </a:ext>
             </a:extLst>
           </p:cNvPr>
@@ -11926,7 +11934,7 @@
           <p:cNvPr id="3" name="">
             <a:extLst xmlns:a="http://schemas.openxmlformats.org/drawingml/2006/main">
               <a:ext uri="{FF2B5EF4-FFF2-40B4-BE49-F238E27FC236}">
-                <a16:creationId xmlns:a16="http://schemas.microsoft.com/office/drawing/2014/main" id="{0DE4F908-C3BF-4A43-BDCB-32F4E930478C}"/>
+                <a16:creationId xmlns:a16="http://schemas.microsoft.com/office/drawing/2014/main" id="{8FAAB026-B158-4738-9A7C-F7B0C9BEC292}"/>
               </a:ext>
             </a:extLst>
           </p:cNvPr>
@@ -11958,7 +11966,7 @@
           <p:cNvPr id="4" name="">
             <a:extLst xmlns:a="http://schemas.openxmlformats.org/drawingml/2006/main">
               <a:ext uri="{FF2B5EF4-FFF2-40B4-BE49-F238E27FC236}">
-                <a16:creationId xmlns:a16="http://schemas.microsoft.com/office/drawing/2014/main" id="{FF49B658-9E0F-4616-A294-166939551EB2}"/>
+                <a16:creationId xmlns:a16="http://schemas.microsoft.com/office/drawing/2014/main" id="{EF0D8AF9-4654-4D21-8862-7327B07284B3}"/>
               </a:ext>
             </a:extLst>
           </p:cNvPr>
@@ -12015,7 +12023,7 @@
           <p:cNvPr id="5" name="">
             <a:extLst xmlns:a="http://schemas.openxmlformats.org/drawingml/2006/main">
               <a:ext uri="{FF2B5EF4-FFF2-40B4-BE49-F238E27FC236}">
-                <a16:creationId xmlns:a16="http://schemas.microsoft.com/office/drawing/2014/main" id="{09EFCC04-637D-42B7-925F-1B36EF0A8181}"/>
+                <a16:creationId xmlns:a16="http://schemas.microsoft.com/office/drawing/2014/main" id="{1CEF69C3-2E13-40D2-BDA4-F1B64DACA449}"/>
               </a:ext>
             </a:extLst>
           </p:cNvPr>
@@ -12072,7 +12080,7 @@
           <p:cNvPr id="6" name="">
             <a:extLst xmlns:a="http://schemas.openxmlformats.org/drawingml/2006/main">
               <a:ext uri="{FF2B5EF4-FFF2-40B4-BE49-F238E27FC236}">
-                <a16:creationId xmlns:a16="http://schemas.microsoft.com/office/drawing/2014/main" id="{2BFE99F0-8B18-4F0B-9833-EF785414D300}"/>
+                <a16:creationId xmlns:a16="http://schemas.microsoft.com/office/drawing/2014/main" id="{6AB26CD4-573F-48D7-91CC-CA8697091126}"/>
               </a:ext>
             </a:extLst>
           </p:cNvPr>
@@ -12129,7 +12137,7 @@
           <p:cNvPr id="7" name="">
             <a:extLst xmlns:a="http://schemas.openxmlformats.org/drawingml/2006/main">
               <a:ext uri="{FF2B5EF4-FFF2-40B4-BE49-F238E27FC236}">
-                <a16:creationId xmlns:a16="http://schemas.microsoft.com/office/drawing/2014/main" id="{06230FD1-FB55-4445-908C-5AB265BD4A71}"/>
+                <a16:creationId xmlns:a16="http://schemas.microsoft.com/office/drawing/2014/main" id="{7990E490-7E84-4E04-ADFE-A59887E569CB}"/>
               </a:ext>
             </a:extLst>
           </p:cNvPr>
@@ -12161,7 +12169,7 @@
           <p:cNvPr id="8" name="">
             <a:extLst xmlns:a="http://schemas.openxmlformats.org/drawingml/2006/main">
               <a:ext uri="{FF2B5EF4-FFF2-40B4-BE49-F238E27FC236}">
-                <a16:creationId xmlns:a16="http://schemas.microsoft.com/office/drawing/2014/main" id="{EEA55383-83BA-4918-A835-6E5058115FA3}"/>
+                <a16:creationId xmlns:a16="http://schemas.microsoft.com/office/drawing/2014/main" id="{01BC9703-05F5-4E51-B331-2B39E8B2B01A}"/>
               </a:ext>
             </a:extLst>
           </p:cNvPr>
@@ -12218,7 +12226,7 @@
           <p:cNvPr id="9" name="">
             <a:extLst xmlns:a="http://schemas.openxmlformats.org/drawingml/2006/main">
               <a:ext uri="{FF2B5EF4-FFF2-40B4-BE49-F238E27FC236}">
-                <a16:creationId xmlns:a16="http://schemas.microsoft.com/office/drawing/2014/main" id="{8CDCC890-9E3F-4E46-AEBB-68F7311E4004}"/>
+                <a16:creationId xmlns:a16="http://schemas.microsoft.com/office/drawing/2014/main" id="{E1C40D85-66E8-48E2-B39B-B0B9ADC31B21}"/>
               </a:ext>
             </a:extLst>
           </p:cNvPr>
@@ -12275,7 +12283,7 @@
           <p:cNvPr id="10" name="">
             <a:extLst xmlns:a="http://schemas.openxmlformats.org/drawingml/2006/main">
               <a:ext uri="{FF2B5EF4-FFF2-40B4-BE49-F238E27FC236}">
-                <a16:creationId xmlns:a16="http://schemas.microsoft.com/office/drawing/2014/main" id="{DE12CE18-8133-4330-A3D9-610879846F0F}"/>
+                <a16:creationId xmlns:a16="http://schemas.microsoft.com/office/drawing/2014/main" id="{D061C32A-4C22-4E0D-A450-06F1BBA897D8}"/>
               </a:ext>
             </a:extLst>
           </p:cNvPr>
@@ -12309,7 +12317,7 @@
           <p:cNvPr id="11" name="">
             <a:extLst xmlns:a="http://schemas.openxmlformats.org/drawingml/2006/main">
               <a:ext uri="{FF2B5EF4-FFF2-40B4-BE49-F238E27FC236}">
-                <a16:creationId xmlns:a16="http://schemas.microsoft.com/office/drawing/2014/main" id="{EDB83738-8A40-4765-803D-A9517F47E96B}"/>
+                <a16:creationId xmlns:a16="http://schemas.microsoft.com/office/drawing/2014/main" id="{5E0BA0A3-6D17-4DAD-99B8-BBBBDBC5BFA7}"/>
               </a:ext>
             </a:extLst>
           </p:cNvPr>
@@ -12341,7 +12349,7 @@
           <p:cNvPr id="12" name="">
             <a:extLst xmlns:a="http://schemas.openxmlformats.org/drawingml/2006/main">
               <a:ext uri="{FF2B5EF4-FFF2-40B4-BE49-F238E27FC236}">
-                <a16:creationId xmlns:a16="http://schemas.microsoft.com/office/drawing/2014/main" id="{B024D5E1-D3CC-483B-B72C-361780DFC7D5}"/>
+                <a16:creationId xmlns:a16="http://schemas.microsoft.com/office/drawing/2014/main" id="{26B08F92-F379-4E46-998E-2AB5D438D09B}"/>
               </a:ext>
             </a:extLst>
           </p:cNvPr>
@@ -12398,7 +12406,7 @@
           <p:cNvPr id="13" name="">
             <a:extLst xmlns:a="http://schemas.openxmlformats.org/drawingml/2006/main">
               <a:ext uri="{FF2B5EF4-FFF2-40B4-BE49-F238E27FC236}">
-                <a16:creationId xmlns:a16="http://schemas.microsoft.com/office/drawing/2014/main" id="{77D62EB9-26FC-4947-8BDB-0907067C2A92}"/>
+                <a16:creationId xmlns:a16="http://schemas.microsoft.com/office/drawing/2014/main" id="{87501CAC-1562-4CE2-9CF1-8EBD6442379E}"/>
               </a:ext>
             </a:extLst>
           </p:cNvPr>
@@ -12455,7 +12463,7 @@
           <p:cNvPr id="14" name="">
             <a:extLst xmlns:a="http://schemas.openxmlformats.org/drawingml/2006/main">
               <a:ext uri="{FF2B5EF4-FFF2-40B4-BE49-F238E27FC236}">
-                <a16:creationId xmlns:a16="http://schemas.microsoft.com/office/drawing/2014/main" id="{D4BD5A54-D325-4EC0-A8D6-6BE33FBADF6B}"/>
+                <a16:creationId xmlns:a16="http://schemas.microsoft.com/office/drawing/2014/main" id="{189209DE-3D81-41D0-89F3-58B129D562F0}"/>
               </a:ext>
             </a:extLst>
           </p:cNvPr>
@@ -12489,7 +12497,7 @@
           <p:cNvPr id="15" name="">
             <a:extLst xmlns:a="http://schemas.openxmlformats.org/drawingml/2006/main">
               <a:ext uri="{FF2B5EF4-FFF2-40B4-BE49-F238E27FC236}">
-                <a16:creationId xmlns:a16="http://schemas.microsoft.com/office/drawing/2014/main" id="{53FE269C-AB64-4DC5-944E-642238A48C91}"/>
+                <a16:creationId xmlns:a16="http://schemas.microsoft.com/office/drawing/2014/main" id="{0B6AB2A7-3D0B-4D9F-A978-68ECFD2FCBCB}"/>
               </a:ext>
             </a:extLst>
           </p:cNvPr>
@@ -12521,7 +12529,7 @@
           <p:cNvPr id="16" name="">
             <a:extLst xmlns:a="http://schemas.openxmlformats.org/drawingml/2006/main">
               <a:ext uri="{FF2B5EF4-FFF2-40B4-BE49-F238E27FC236}">
-                <a16:creationId xmlns:a16="http://schemas.microsoft.com/office/drawing/2014/main" id="{79DE59C0-35F1-4E1C-9BB2-CCDB666E93B8}"/>
+                <a16:creationId xmlns:a16="http://schemas.microsoft.com/office/drawing/2014/main" id="{C79F08A2-A92E-46F5-834B-CB7F288BE32D}"/>
               </a:ext>
             </a:extLst>
           </p:cNvPr>
@@ -12578,7 +12586,7 @@
           <p:cNvPr id="17" name="">
             <a:extLst xmlns:a="http://schemas.openxmlformats.org/drawingml/2006/main">
               <a:ext uri="{FF2B5EF4-FFF2-40B4-BE49-F238E27FC236}">
-                <a16:creationId xmlns:a16="http://schemas.microsoft.com/office/drawing/2014/main" id="{0FC879E4-77D1-4772-A112-93057CACA89C}"/>
+                <a16:creationId xmlns:a16="http://schemas.microsoft.com/office/drawing/2014/main" id="{2A63E4D1-7451-4EF1-8C62-F462C4A529C9}"/>
               </a:ext>
             </a:extLst>
           </p:cNvPr>
@@ -12635,7 +12643,7 @@
           <p:cNvPr id="18" name="">
             <a:extLst xmlns:a="http://schemas.openxmlformats.org/drawingml/2006/main">
               <a:ext uri="{FF2B5EF4-FFF2-40B4-BE49-F238E27FC236}">
-                <a16:creationId xmlns:a16="http://schemas.microsoft.com/office/drawing/2014/main" id="{D25EE607-2E35-4DA6-A7AB-DA10CCD00D52}"/>
+                <a16:creationId xmlns:a16="http://schemas.microsoft.com/office/drawing/2014/main" id="{406E5DC9-415E-41B0-887A-3F5858A75B22}"/>
               </a:ext>
             </a:extLst>
           </p:cNvPr>
@@ -12669,7 +12677,7 @@
           <p:cNvPr id="19" name="">
             <a:extLst xmlns:a="http://schemas.openxmlformats.org/drawingml/2006/main">
               <a:ext uri="{FF2B5EF4-FFF2-40B4-BE49-F238E27FC236}">
-                <a16:creationId xmlns:a16="http://schemas.microsoft.com/office/drawing/2014/main" id="{9806D841-3C77-44BC-99EE-CAF660A9CE4E}"/>
+                <a16:creationId xmlns:a16="http://schemas.microsoft.com/office/drawing/2014/main" id="{785BC6D1-9730-43E3-87C8-B06EA718F5E3}"/>
               </a:ext>
             </a:extLst>
           </p:cNvPr>
@@ -12701,7 +12709,7 @@
           <p:cNvPr id="20" name="">
             <a:extLst xmlns:a="http://schemas.openxmlformats.org/drawingml/2006/main">
               <a:ext uri="{FF2B5EF4-FFF2-40B4-BE49-F238E27FC236}">
-                <a16:creationId xmlns:a16="http://schemas.microsoft.com/office/drawing/2014/main" id="{D2B36B10-F3C1-4959-A586-85802A45D83B}"/>
+                <a16:creationId xmlns:a16="http://schemas.microsoft.com/office/drawing/2014/main" id="{A031D11A-43E9-465E-832E-FBC0A5D056CC}"/>
               </a:ext>
             </a:extLst>
           </p:cNvPr>
@@ -12758,7 +12766,7 @@
           <p:cNvPr id="21" name="">
             <a:extLst xmlns:a="http://schemas.openxmlformats.org/drawingml/2006/main">
               <a:ext uri="{FF2B5EF4-FFF2-40B4-BE49-F238E27FC236}">
-                <a16:creationId xmlns:a16="http://schemas.microsoft.com/office/drawing/2014/main" id="{240A4BC6-7969-4BC3-BF7C-207D13DF75CD}"/>
+                <a16:creationId xmlns:a16="http://schemas.microsoft.com/office/drawing/2014/main" id="{4670EFC8-BFCE-4F86-A51C-33F63977CD84}"/>
               </a:ext>
             </a:extLst>
           </p:cNvPr>
@@ -12815,7 +12823,7 @@
           <p:cNvPr id="22" name="">
             <a:extLst xmlns:a="http://schemas.openxmlformats.org/drawingml/2006/main">
               <a:ext uri="{FF2B5EF4-FFF2-40B4-BE49-F238E27FC236}">
-                <a16:creationId xmlns:a16="http://schemas.microsoft.com/office/drawing/2014/main" id="{B2ADE3EB-E294-4132-8EE4-B37F3FE7EB44}"/>
+                <a16:creationId xmlns:a16="http://schemas.microsoft.com/office/drawing/2014/main" id="{3C36DB02-86BD-43A6-8150-8A55BDFD8DB4}"/>
               </a:ext>
             </a:extLst>
           </p:cNvPr>
@@ -12870,7 +12878,7 @@
     </p:spTree>
     <p:extLst>
       <p:ext uri="{BB962C8B-B14F-4D97-AF65-F5344CB8AC3E}">
-        <p14:creationId xmlns:p14="http://schemas.microsoft.com/office/powerpoint/2010/main" val="1973775127"/>
+        <p14:creationId xmlns:p14="http://schemas.microsoft.com/office/powerpoint/2010/main" val="1716072957"/>
       </p:ext>
     </p:extLst>
   </p:cSld>
@@ -13071,7 +13079,7 @@
           <p:cNvPr id="22" name="">
             <a:extLst xmlns:a="http://schemas.openxmlformats.org/drawingml/2006/main">
               <a:ext uri="{FF2B5EF4-FFF2-40B4-BE49-F238E27FC236}">
-                <a16:creationId xmlns:a16="http://schemas.microsoft.com/office/drawing/2014/main" id="{302CBF00-3AAD-4930-9AA3-EDA0FBF0ACF1}"/>
+                <a16:creationId xmlns:a16="http://schemas.microsoft.com/office/drawing/2014/main" id="{8AC585F3-54C9-4D97-B555-7DF2725BE3D8}"/>
               </a:ext>
             </a:extLst>
           </p:cNvPr>
@@ -13103,7 +13111,7 @@
           <p:cNvPr id="2" name="">
             <a:extLst xmlns:a="http://schemas.openxmlformats.org/drawingml/2006/main">
               <a:ext uri="{FF2B5EF4-FFF2-40B4-BE49-F238E27FC236}">
-                <a16:creationId xmlns:a16="http://schemas.microsoft.com/office/drawing/2014/main" id="{11AEBF77-A513-46D1-BDF6-BB453316D3B3}"/>
+                <a16:creationId xmlns:a16="http://schemas.microsoft.com/office/drawing/2014/main" id="{06817EDD-228E-4B64-A17D-D53415FDA137}"/>
               </a:ext>
             </a:extLst>
           </p:cNvPr>
@@ -13160,7 +13168,7 @@
           <p:cNvPr id="3" name="">
             <a:extLst xmlns:a="http://schemas.openxmlformats.org/drawingml/2006/main">
               <a:ext uri="{FF2B5EF4-FFF2-40B4-BE49-F238E27FC236}">
-                <a16:creationId xmlns:a16="http://schemas.microsoft.com/office/drawing/2014/main" id="{B8A5E4D1-229D-4996-BC9B-C90717D183E8}"/>
+                <a16:creationId xmlns:a16="http://schemas.microsoft.com/office/drawing/2014/main" id="{6F2D7F87-C099-452F-A86F-9F723BB4E1A1}"/>
               </a:ext>
             </a:extLst>
           </p:cNvPr>
@@ -13192,7 +13200,7 @@
           <p:cNvPr id="4" name="">
             <a:extLst xmlns:a="http://schemas.openxmlformats.org/drawingml/2006/main">
               <a:ext uri="{FF2B5EF4-FFF2-40B4-BE49-F238E27FC236}">
-                <a16:creationId xmlns:a16="http://schemas.microsoft.com/office/drawing/2014/main" id="{5F2137E7-95B5-4453-9A0E-BAF3FE03DE73}"/>
+                <a16:creationId xmlns:a16="http://schemas.microsoft.com/office/drawing/2014/main" id="{F37EF5F6-293E-4475-A0FB-088465385263}"/>
               </a:ext>
             </a:extLst>
           </p:cNvPr>
@@ -13249,7 +13257,7 @@
           <p:cNvPr id="5" name="">
             <a:extLst xmlns:a="http://schemas.openxmlformats.org/drawingml/2006/main">
               <a:ext uri="{FF2B5EF4-FFF2-40B4-BE49-F238E27FC236}">
-                <a16:creationId xmlns:a16="http://schemas.microsoft.com/office/drawing/2014/main" id="{772408AD-F83A-43FD-92B7-6E24641D4596}"/>
+                <a16:creationId xmlns:a16="http://schemas.microsoft.com/office/drawing/2014/main" id="{EEF1C38E-DDAF-4821-9863-E671B9B9C5CC}"/>
               </a:ext>
             </a:extLst>
           </p:cNvPr>
@@ -13306,7 +13314,7 @@
           <p:cNvPr id="6" name="">
             <a:extLst xmlns:a="http://schemas.openxmlformats.org/drawingml/2006/main">
               <a:ext uri="{FF2B5EF4-FFF2-40B4-BE49-F238E27FC236}">
-                <a16:creationId xmlns:a16="http://schemas.microsoft.com/office/drawing/2014/main" id="{95581E65-8732-46F2-87DD-DB96A3C4C689}"/>
+                <a16:creationId xmlns:a16="http://schemas.microsoft.com/office/drawing/2014/main" id="{C6231906-0236-40A2-BD00-F0CB95A1ADF9}"/>
               </a:ext>
             </a:extLst>
           </p:cNvPr>
@@ -13363,7 +13371,7 @@
           <p:cNvPr id="7" name="">
             <a:extLst xmlns:a="http://schemas.openxmlformats.org/drawingml/2006/main">
               <a:ext uri="{FF2B5EF4-FFF2-40B4-BE49-F238E27FC236}">
-                <a16:creationId xmlns:a16="http://schemas.microsoft.com/office/drawing/2014/main" id="{278D1306-764F-4AEF-868F-BEF11BB957A9}"/>
+                <a16:creationId xmlns:a16="http://schemas.microsoft.com/office/drawing/2014/main" id="{C870F27D-777F-4A2F-BB4E-B2A6D60C2097}"/>
               </a:ext>
             </a:extLst>
           </p:cNvPr>
@@ -13395,7 +13403,7 @@
           <p:cNvPr id="8" name="">
             <a:extLst xmlns:a="http://schemas.openxmlformats.org/drawingml/2006/main">
               <a:ext uri="{FF2B5EF4-FFF2-40B4-BE49-F238E27FC236}">
-                <a16:creationId xmlns:a16="http://schemas.microsoft.com/office/drawing/2014/main" id="{E5F95EA4-DB6D-4A11-B7D7-BDC60B2F9D2D}"/>
+                <a16:creationId xmlns:a16="http://schemas.microsoft.com/office/drawing/2014/main" id="{26E55BC4-A628-4BB5-A491-D697704B56BB}"/>
               </a:ext>
             </a:extLst>
           </p:cNvPr>
@@ -13452,7 +13460,7 @@
           <p:cNvPr id="9" name="">
             <a:extLst xmlns:a="http://schemas.openxmlformats.org/drawingml/2006/main">
               <a:ext uri="{FF2B5EF4-FFF2-40B4-BE49-F238E27FC236}">
-                <a16:creationId xmlns:a16="http://schemas.microsoft.com/office/drawing/2014/main" id="{5F0288A6-9D96-4116-8738-7A1926B3D136}"/>
+                <a16:creationId xmlns:a16="http://schemas.microsoft.com/office/drawing/2014/main" id="{53586F26-8410-42CE-BF5C-3CFFD3776833}"/>
               </a:ext>
             </a:extLst>
           </p:cNvPr>
@@ -13509,7 +13517,7 @@
           <p:cNvPr id="10" name="">
             <a:extLst xmlns:a="http://schemas.openxmlformats.org/drawingml/2006/main">
               <a:ext uri="{FF2B5EF4-FFF2-40B4-BE49-F238E27FC236}">
-                <a16:creationId xmlns:a16="http://schemas.microsoft.com/office/drawing/2014/main" id="{8747FE0A-4088-4646-91C9-69A4AA53FDD8}"/>
+                <a16:creationId xmlns:a16="http://schemas.microsoft.com/office/drawing/2014/main" id="{F194584B-F1B5-47F5-99C6-33C9D26062C4}"/>
               </a:ext>
             </a:extLst>
           </p:cNvPr>
@@ -13543,7 +13551,7 @@
           <p:cNvPr id="11" name="">
             <a:extLst xmlns:a="http://schemas.openxmlformats.org/drawingml/2006/main">
               <a:ext uri="{FF2B5EF4-FFF2-40B4-BE49-F238E27FC236}">
-                <a16:creationId xmlns:a16="http://schemas.microsoft.com/office/drawing/2014/main" id="{0C2DFF4F-42B2-4FCE-9311-45FAB0AD86A5}"/>
+                <a16:creationId xmlns:a16="http://schemas.microsoft.com/office/drawing/2014/main" id="{4D432B1E-AE3C-46CA-A09B-6316D05FA158}"/>
               </a:ext>
             </a:extLst>
           </p:cNvPr>
@@ -13575,7 +13583,7 @@
           <p:cNvPr id="12" name="">
             <a:extLst xmlns:a="http://schemas.openxmlformats.org/drawingml/2006/main">
               <a:ext uri="{FF2B5EF4-FFF2-40B4-BE49-F238E27FC236}">
-                <a16:creationId xmlns:a16="http://schemas.microsoft.com/office/drawing/2014/main" id="{8850378F-FA91-4F89-AFE4-ADD8F961474C}"/>
+                <a16:creationId xmlns:a16="http://schemas.microsoft.com/office/drawing/2014/main" id="{1DAA2DAF-7013-4BF7-BB28-4D586F8CC669}"/>
               </a:ext>
             </a:extLst>
           </p:cNvPr>
@@ -13632,7 +13640,7 @@
           <p:cNvPr id="13" name="">
             <a:extLst xmlns:a="http://schemas.openxmlformats.org/drawingml/2006/main">
               <a:ext uri="{FF2B5EF4-FFF2-40B4-BE49-F238E27FC236}">
-                <a16:creationId xmlns:a16="http://schemas.microsoft.com/office/drawing/2014/main" id="{D436B058-9B44-46BB-AE11-C5CACAA93743}"/>
+                <a16:creationId xmlns:a16="http://schemas.microsoft.com/office/drawing/2014/main" id="{32C6986B-334A-4697-8824-6793FABB18F6}"/>
               </a:ext>
             </a:extLst>
           </p:cNvPr>
@@ -13689,7 +13697,7 @@
           <p:cNvPr id="14" name="">
             <a:extLst xmlns:a="http://schemas.openxmlformats.org/drawingml/2006/main">
               <a:ext uri="{FF2B5EF4-FFF2-40B4-BE49-F238E27FC236}">
-                <a16:creationId xmlns:a16="http://schemas.microsoft.com/office/drawing/2014/main" id="{3B1FCD73-884F-4AD3-B25E-D21241F977AD}"/>
+                <a16:creationId xmlns:a16="http://schemas.microsoft.com/office/drawing/2014/main" id="{995504BF-7004-4EE8-894B-006D0B31BBB4}"/>
               </a:ext>
             </a:extLst>
           </p:cNvPr>
@@ -13723,7 +13731,7 @@
           <p:cNvPr id="15" name="">
             <a:extLst xmlns:a="http://schemas.openxmlformats.org/drawingml/2006/main">
               <a:ext uri="{FF2B5EF4-FFF2-40B4-BE49-F238E27FC236}">
-                <a16:creationId xmlns:a16="http://schemas.microsoft.com/office/drawing/2014/main" id="{2C2F106D-5238-4401-9761-12A83A804237}"/>
+                <a16:creationId xmlns:a16="http://schemas.microsoft.com/office/drawing/2014/main" id="{7BC30403-5E15-4441-A05F-D0C52E0ADD81}"/>
               </a:ext>
             </a:extLst>
           </p:cNvPr>
@@ -13755,7 +13763,7 @@
           <p:cNvPr id="16" name="">
             <a:extLst xmlns:a="http://schemas.openxmlformats.org/drawingml/2006/main">
               <a:ext uri="{FF2B5EF4-FFF2-40B4-BE49-F238E27FC236}">
-                <a16:creationId xmlns:a16="http://schemas.microsoft.com/office/drawing/2014/main" id="{503CB13B-EF8D-47A1-9F71-03A29133D8D3}"/>
+                <a16:creationId xmlns:a16="http://schemas.microsoft.com/office/drawing/2014/main" id="{F4401F54-9AC2-42FF-97D2-D9215598DD02}"/>
               </a:ext>
             </a:extLst>
           </p:cNvPr>
@@ -13812,7 +13820,7 @@
           <p:cNvPr id="17" name="">
             <a:extLst xmlns:a="http://schemas.openxmlformats.org/drawingml/2006/main">
               <a:ext uri="{FF2B5EF4-FFF2-40B4-BE49-F238E27FC236}">
-                <a16:creationId xmlns:a16="http://schemas.microsoft.com/office/drawing/2014/main" id="{E43D9655-1D2A-4E72-A41C-129A3696D2D1}"/>
+                <a16:creationId xmlns:a16="http://schemas.microsoft.com/office/drawing/2014/main" id="{D8F59A44-1EDD-4E32-A383-E20A62B2966F}"/>
               </a:ext>
             </a:extLst>
           </p:cNvPr>
@@ -13869,7 +13877,7 @@
           <p:cNvPr id="18" name="">
             <a:extLst xmlns:a="http://schemas.openxmlformats.org/drawingml/2006/main">
               <a:ext uri="{FF2B5EF4-FFF2-40B4-BE49-F238E27FC236}">
-                <a16:creationId xmlns:a16="http://schemas.microsoft.com/office/drawing/2014/main" id="{4D11B1AD-E17B-4421-944F-BD2D1DD44110}"/>
+                <a16:creationId xmlns:a16="http://schemas.microsoft.com/office/drawing/2014/main" id="{1F73F630-A139-423E-91A3-0C195AEA5FCA}"/>
               </a:ext>
             </a:extLst>
           </p:cNvPr>
@@ -13903,7 +13911,7 @@
           <p:cNvPr id="19" name="">
             <a:extLst xmlns:a="http://schemas.openxmlformats.org/drawingml/2006/main">
               <a:ext uri="{FF2B5EF4-FFF2-40B4-BE49-F238E27FC236}">
-                <a16:creationId xmlns:a16="http://schemas.microsoft.com/office/drawing/2014/main" id="{7967FEA5-607D-4649-BEAB-CA9054585114}"/>
+                <a16:creationId xmlns:a16="http://schemas.microsoft.com/office/drawing/2014/main" id="{F29E556B-1520-444F-A0BF-C8FE0AAFE280}"/>
               </a:ext>
             </a:extLst>
           </p:cNvPr>
@@ -13935,7 +13943,7 @@
           <p:cNvPr id="20" name="">
             <a:extLst xmlns:a="http://schemas.openxmlformats.org/drawingml/2006/main">
               <a:ext uri="{FF2B5EF4-FFF2-40B4-BE49-F238E27FC236}">
-                <a16:creationId xmlns:a16="http://schemas.microsoft.com/office/drawing/2014/main" id="{023B0037-29EC-4B55-A078-E591DE812B48}"/>
+                <a16:creationId xmlns:a16="http://schemas.microsoft.com/office/drawing/2014/main" id="{0A241930-252F-42C2-9916-A3AB94698341}"/>
               </a:ext>
             </a:extLst>
           </p:cNvPr>
@@ -13992,7 +14000,7 @@
           <p:cNvPr id="21" name="">
             <a:extLst xmlns:a="http://schemas.openxmlformats.org/drawingml/2006/main">
               <a:ext uri="{FF2B5EF4-FFF2-40B4-BE49-F238E27FC236}">
-                <a16:creationId xmlns:a16="http://schemas.microsoft.com/office/drawing/2014/main" id="{6C3D946D-049B-4C6B-AC0D-D8EF9C1AA417}"/>
+                <a16:creationId xmlns:a16="http://schemas.microsoft.com/office/drawing/2014/main" id="{498D9ED6-DD56-4EA9-A7D2-ADF10BA39413}"/>
               </a:ext>
             </a:extLst>
           </p:cNvPr>
@@ -14047,7 +14055,7 @@
     </p:spTree>
     <p:extLst>
       <p:ext uri="{BB962C8B-B14F-4D97-AF65-F5344CB8AC3E}">
-        <p14:creationId xmlns:p14="http://schemas.microsoft.com/office/powerpoint/2010/main" val="731982482"/>
+        <p14:creationId xmlns:p14="http://schemas.microsoft.com/office/powerpoint/2010/main" val="1914564967"/>
       </p:ext>
     </p:extLst>
   </p:cSld>
